--- a/docs/PPAMONG_예측게임_시스템흐름.pptx
+++ b/docs/PPAMONG_예측게임_시스템흐름.pptx
@@ -5,18 +5,18 @@
     <p:sldMasterId id="2147483648" r:id="rId1"/>
   </p:sldMasterIdLst>
   <p:sldIdLst>
-    <p:sldId id="256" r:id="rId7"/>
-    <p:sldId id="257" r:id="rId8"/>
-    <p:sldId id="258" r:id="rId9"/>
-    <p:sldId id="259" r:id="rId10"/>
-    <p:sldId id="260" r:id="rId11"/>
-    <p:sldId id="261" r:id="rId12"/>
-    <p:sldId id="262" r:id="rId13"/>
-    <p:sldId id="263" r:id="rId14"/>
-    <p:sldId id="264" r:id="rId15"/>
-    <p:sldId id="265" r:id="rId16"/>
+    <p:sldId id="256" r:id="rId2"/>
+    <p:sldId id="257" r:id="rId3"/>
+    <p:sldId id="258" r:id="rId4"/>
+    <p:sldId id="259" r:id="rId5"/>
+    <p:sldId id="260" r:id="rId6"/>
+    <p:sldId id="261" r:id="rId7"/>
+    <p:sldId id="262" r:id="rId8"/>
+    <p:sldId id="263" r:id="rId9"/>
+    <p:sldId id="264" r:id="rId10"/>
+    <p:sldId id="265" r:id="rId11"/>
   </p:sldIdLst>
-  <p:sldSz cx="12191695" cy="6858000" type="screen4x3"/>
+  <p:sldSz cx="12192000" cy="6858000"/>
   <p:notesSz cx="6858000" cy="9144000"/>
   <p:defaultTextStyle>
     <a:defPPr>
@@ -113,6 +113,22 @@
       </a:defRPr>
     </a:lvl9pPr>
   </p:defaultTextStyle>
+  <p:extLst>
+    <p:ext uri="{EFAFB233-063F-42B5-8137-9DF3F51BA10A}">
+      <p15:sldGuideLst xmlns:p15="http://schemas.microsoft.com/office/powerpoint/2012/main">
+        <p15:guide id="1" orient="horz" pos="2160">
+          <p15:clr>
+            <a:srgbClr val="A4A3A4"/>
+          </p15:clr>
+        </p15:guide>
+        <p15:guide id="2" pos="2880">
+          <p15:clr>
+            <a:srgbClr val="A4A3A4"/>
+          </p15:clr>
+        </p15:guide>
+      </p15:sldGuideLst>
+    </p:ext>
+  </p:extLst>
 </p:presentation>
 </file>
 
@@ -154,10 +170,9 @@
           <a:lstStyle/>
           <a:p>
             <a:r>
-              <a:rPr lang="en-US" smtClean="0"/>
+              <a:rPr lang="en-US"/>
               <a:t>Click to edit Master title style</a:t>
             </a:r>
-            <a:endParaRPr lang="en-US"/>
           </a:p>
         </p:txBody>
       </p:sp>
@@ -273,10 +288,9 @@
           </a:lstStyle>
           <a:p>
             <a:r>
-              <a:rPr lang="en-US" smtClean="0"/>
+              <a:rPr lang="en-US"/>
               <a:t>Click to edit Master subtitle style</a:t>
             </a:r>
-            <a:endParaRPr lang="en-US"/>
           </a:p>
         </p:txBody>
       </p:sp>
@@ -297,7 +311,7 @@
           <a:p>
             <a:fld id="{5BCAD085-E8A6-8845-BD4E-CB4CCA059FC4}" type="datetimeFigureOut">
               <a:rPr lang="en-US" smtClean="0"/>
-              <a:t>1/27/13</a:t>
+              <a:t>7/25/2026</a:t>
             </a:fld>
             <a:endParaRPr lang="en-US"/>
           </a:p>
@@ -391,10 +405,9 @@
           <a:lstStyle/>
           <a:p>
             <a:r>
-              <a:rPr lang="en-US" smtClean="0"/>
+              <a:rPr lang="en-US"/>
               <a:t>Click to edit Master title style</a:t>
             </a:r>
-            <a:endParaRPr lang="en-US"/>
           </a:p>
         </p:txBody>
       </p:sp>
@@ -415,38 +428,37 @@
           <a:p>
             <a:pPr lvl="0"/>
             <a:r>
-              <a:rPr lang="en-US" smtClean="0"/>
+              <a:rPr lang="en-US"/>
               <a:t>Click to edit Master text styles</a:t>
             </a:r>
           </a:p>
           <a:p>
             <a:pPr lvl="1"/>
             <a:r>
-              <a:rPr lang="en-US" smtClean="0"/>
+              <a:rPr lang="en-US"/>
               <a:t>Second level</a:t>
             </a:r>
           </a:p>
           <a:p>
             <a:pPr lvl="2"/>
             <a:r>
-              <a:rPr lang="en-US" smtClean="0"/>
+              <a:rPr lang="en-US"/>
               <a:t>Third level</a:t>
             </a:r>
           </a:p>
           <a:p>
             <a:pPr lvl="3"/>
             <a:r>
-              <a:rPr lang="en-US" smtClean="0"/>
+              <a:rPr lang="en-US"/>
               <a:t>Fourth level</a:t>
             </a:r>
           </a:p>
           <a:p>
             <a:pPr lvl="4"/>
             <a:r>
-              <a:rPr lang="en-US" smtClean="0"/>
+              <a:rPr lang="en-US"/>
               <a:t>Fifth level</a:t>
             </a:r>
-            <a:endParaRPr lang="en-US"/>
           </a:p>
         </p:txBody>
       </p:sp>
@@ -467,7 +479,7 @@
           <a:p>
             <a:fld id="{5BCAD085-E8A6-8845-BD4E-CB4CCA059FC4}" type="datetimeFigureOut">
               <a:rPr lang="en-US" smtClean="0"/>
-              <a:t>1/27/13</a:t>
+              <a:t>7/25/2026</a:t>
             </a:fld>
             <a:endParaRPr lang="en-US"/>
           </a:p>
@@ -566,10 +578,9 @@
           <a:lstStyle/>
           <a:p>
             <a:r>
-              <a:rPr lang="en-US" smtClean="0"/>
+              <a:rPr lang="en-US"/>
               <a:t>Click to edit Master title style</a:t>
             </a:r>
-            <a:endParaRPr lang="en-US"/>
           </a:p>
         </p:txBody>
       </p:sp>
@@ -595,38 +606,37 @@
           <a:p>
             <a:pPr lvl="0"/>
             <a:r>
-              <a:rPr lang="en-US" smtClean="0"/>
+              <a:rPr lang="en-US"/>
               <a:t>Click to edit Master text styles</a:t>
             </a:r>
           </a:p>
           <a:p>
             <a:pPr lvl="1"/>
             <a:r>
-              <a:rPr lang="en-US" smtClean="0"/>
+              <a:rPr lang="en-US"/>
               <a:t>Second level</a:t>
             </a:r>
           </a:p>
           <a:p>
             <a:pPr lvl="2"/>
             <a:r>
-              <a:rPr lang="en-US" smtClean="0"/>
+              <a:rPr lang="en-US"/>
               <a:t>Third level</a:t>
             </a:r>
           </a:p>
           <a:p>
             <a:pPr lvl="3"/>
             <a:r>
-              <a:rPr lang="en-US" smtClean="0"/>
+              <a:rPr lang="en-US"/>
               <a:t>Fourth level</a:t>
             </a:r>
           </a:p>
           <a:p>
             <a:pPr lvl="4"/>
             <a:r>
-              <a:rPr lang="en-US" smtClean="0"/>
+              <a:rPr lang="en-US"/>
               <a:t>Fifth level</a:t>
             </a:r>
-            <a:endParaRPr lang="en-US"/>
           </a:p>
         </p:txBody>
       </p:sp>
@@ -647,7 +657,7 @@
           <a:p>
             <a:fld id="{5BCAD085-E8A6-8845-BD4E-CB4CCA059FC4}" type="datetimeFigureOut">
               <a:rPr lang="en-US" smtClean="0"/>
-              <a:t>1/27/13</a:t>
+              <a:t>7/25/2026</a:t>
             </a:fld>
             <a:endParaRPr lang="en-US"/>
           </a:p>
@@ -741,10 +751,9 @@
           <a:lstStyle/>
           <a:p>
             <a:r>
-              <a:rPr lang="en-US" smtClean="0"/>
+              <a:rPr lang="en-US"/>
               <a:t>Click to edit Master title style</a:t>
             </a:r>
-            <a:endParaRPr lang="en-US"/>
           </a:p>
         </p:txBody>
       </p:sp>
@@ -765,38 +774,37 @@
           <a:p>
             <a:pPr lvl="0"/>
             <a:r>
-              <a:rPr lang="en-US" smtClean="0"/>
+              <a:rPr lang="en-US"/>
               <a:t>Click to edit Master text styles</a:t>
             </a:r>
           </a:p>
           <a:p>
             <a:pPr lvl="1"/>
             <a:r>
-              <a:rPr lang="en-US" smtClean="0"/>
+              <a:rPr lang="en-US"/>
               <a:t>Second level</a:t>
             </a:r>
           </a:p>
           <a:p>
             <a:pPr lvl="2"/>
             <a:r>
-              <a:rPr lang="en-US" smtClean="0"/>
+              <a:rPr lang="en-US"/>
               <a:t>Third level</a:t>
             </a:r>
           </a:p>
           <a:p>
             <a:pPr lvl="3"/>
             <a:r>
-              <a:rPr lang="en-US" smtClean="0"/>
+              <a:rPr lang="en-US"/>
               <a:t>Fourth level</a:t>
             </a:r>
           </a:p>
           <a:p>
             <a:pPr lvl="4"/>
             <a:r>
-              <a:rPr lang="en-US" smtClean="0"/>
+              <a:rPr lang="en-US"/>
               <a:t>Fifth level</a:t>
             </a:r>
-            <a:endParaRPr lang="en-US"/>
           </a:p>
         </p:txBody>
       </p:sp>
@@ -817,7 +825,7 @@
           <a:p>
             <a:fld id="{5BCAD085-E8A6-8845-BD4E-CB4CCA059FC4}" type="datetimeFigureOut">
               <a:rPr lang="en-US" smtClean="0"/>
-              <a:t>1/27/13</a:t>
+              <a:t>7/25/2026</a:t>
             </a:fld>
             <a:endParaRPr lang="en-US"/>
           </a:p>
@@ -920,10 +928,9 @@
           </a:lstStyle>
           <a:p>
             <a:r>
-              <a:rPr lang="en-US" smtClean="0"/>
+              <a:rPr lang="en-US"/>
               <a:t>Click to edit Master title style</a:t>
             </a:r>
-            <a:endParaRPr lang="en-US"/>
           </a:p>
         </p:txBody>
       </p:sp>
@@ -1040,7 +1047,7 @@
           <a:p>
             <a:pPr lvl="0"/>
             <a:r>
-              <a:rPr lang="en-US" smtClean="0"/>
+              <a:rPr lang="en-US"/>
               <a:t>Click to edit Master text styles</a:t>
             </a:r>
           </a:p>
@@ -1063,7 +1070,7 @@
           <a:p>
             <a:fld id="{5BCAD085-E8A6-8845-BD4E-CB4CCA059FC4}" type="datetimeFigureOut">
               <a:rPr lang="en-US" smtClean="0"/>
-              <a:t>1/27/13</a:t>
+              <a:t>7/25/2026</a:t>
             </a:fld>
             <a:endParaRPr lang="en-US"/>
           </a:p>
@@ -1157,10 +1164,9 @@
           <a:lstStyle/>
           <a:p>
             <a:r>
-              <a:rPr lang="en-US" smtClean="0"/>
+              <a:rPr lang="en-US"/>
               <a:t>Click to edit Master title style</a:t>
             </a:r>
-            <a:endParaRPr lang="en-US"/>
           </a:p>
         </p:txBody>
       </p:sp>
@@ -1214,38 +1220,37 @@
           <a:p>
             <a:pPr lvl="0"/>
             <a:r>
-              <a:rPr lang="en-US" smtClean="0"/>
+              <a:rPr lang="en-US"/>
               <a:t>Click to edit Master text styles</a:t>
             </a:r>
           </a:p>
           <a:p>
             <a:pPr lvl="1"/>
             <a:r>
-              <a:rPr lang="en-US" smtClean="0"/>
+              <a:rPr lang="en-US"/>
               <a:t>Second level</a:t>
             </a:r>
           </a:p>
           <a:p>
             <a:pPr lvl="2"/>
             <a:r>
-              <a:rPr lang="en-US" smtClean="0"/>
+              <a:rPr lang="en-US"/>
               <a:t>Third level</a:t>
             </a:r>
           </a:p>
           <a:p>
             <a:pPr lvl="3"/>
             <a:r>
-              <a:rPr lang="en-US" smtClean="0"/>
+              <a:rPr lang="en-US"/>
               <a:t>Fourth level</a:t>
             </a:r>
           </a:p>
           <a:p>
             <a:pPr lvl="4"/>
             <a:r>
-              <a:rPr lang="en-US" smtClean="0"/>
+              <a:rPr lang="en-US"/>
               <a:t>Fifth level</a:t>
             </a:r>
-            <a:endParaRPr lang="en-US"/>
           </a:p>
         </p:txBody>
       </p:sp>
@@ -1299,38 +1304,37 @@
           <a:p>
             <a:pPr lvl="0"/>
             <a:r>
-              <a:rPr lang="en-US" smtClean="0"/>
+              <a:rPr lang="en-US"/>
               <a:t>Click to edit Master text styles</a:t>
             </a:r>
           </a:p>
           <a:p>
             <a:pPr lvl="1"/>
             <a:r>
-              <a:rPr lang="en-US" smtClean="0"/>
+              <a:rPr lang="en-US"/>
               <a:t>Second level</a:t>
             </a:r>
           </a:p>
           <a:p>
             <a:pPr lvl="2"/>
             <a:r>
-              <a:rPr lang="en-US" smtClean="0"/>
+              <a:rPr lang="en-US"/>
               <a:t>Third level</a:t>
             </a:r>
           </a:p>
           <a:p>
             <a:pPr lvl="3"/>
             <a:r>
-              <a:rPr lang="en-US" smtClean="0"/>
+              <a:rPr lang="en-US"/>
               <a:t>Fourth level</a:t>
             </a:r>
           </a:p>
           <a:p>
             <a:pPr lvl="4"/>
             <a:r>
-              <a:rPr lang="en-US" smtClean="0"/>
+              <a:rPr lang="en-US"/>
               <a:t>Fifth level</a:t>
             </a:r>
-            <a:endParaRPr lang="en-US"/>
           </a:p>
         </p:txBody>
       </p:sp>
@@ -1351,7 +1355,7 @@
           <a:p>
             <a:fld id="{5BCAD085-E8A6-8845-BD4E-CB4CCA059FC4}" type="datetimeFigureOut">
               <a:rPr lang="en-US" smtClean="0"/>
-              <a:t>1/27/13</a:t>
+              <a:t>7/25/2026</a:t>
             </a:fld>
             <a:endParaRPr lang="en-US"/>
           </a:p>
@@ -1449,10 +1453,9 @@
           </a:lstStyle>
           <a:p>
             <a:r>
-              <a:rPr lang="en-US" smtClean="0"/>
+              <a:rPr lang="en-US"/>
               <a:t>Click to edit Master title style</a:t>
             </a:r>
-            <a:endParaRPr lang="en-US"/>
           </a:p>
         </p:txBody>
       </p:sp>
@@ -1515,7 +1518,7 @@
           <a:p>
             <a:pPr lvl="0"/>
             <a:r>
-              <a:rPr lang="en-US" smtClean="0"/>
+              <a:rPr lang="en-US"/>
               <a:t>Click to edit Master text styles</a:t>
             </a:r>
           </a:p>
@@ -1571,38 +1574,37 @@
           <a:p>
             <a:pPr lvl="0"/>
             <a:r>
-              <a:rPr lang="en-US" smtClean="0"/>
+              <a:rPr lang="en-US"/>
               <a:t>Click to edit Master text styles</a:t>
             </a:r>
           </a:p>
           <a:p>
             <a:pPr lvl="1"/>
             <a:r>
-              <a:rPr lang="en-US" smtClean="0"/>
+              <a:rPr lang="en-US"/>
               <a:t>Second level</a:t>
             </a:r>
           </a:p>
           <a:p>
             <a:pPr lvl="2"/>
             <a:r>
-              <a:rPr lang="en-US" smtClean="0"/>
+              <a:rPr lang="en-US"/>
               <a:t>Third level</a:t>
             </a:r>
           </a:p>
           <a:p>
             <a:pPr lvl="3"/>
             <a:r>
-              <a:rPr lang="en-US" smtClean="0"/>
+              <a:rPr lang="en-US"/>
               <a:t>Fourth level</a:t>
             </a:r>
           </a:p>
           <a:p>
             <a:pPr lvl="4"/>
             <a:r>
-              <a:rPr lang="en-US" smtClean="0"/>
+              <a:rPr lang="en-US"/>
               <a:t>Fifth level</a:t>
             </a:r>
-            <a:endParaRPr lang="en-US"/>
           </a:p>
         </p:txBody>
       </p:sp>
@@ -1665,7 +1667,7 @@
           <a:p>
             <a:pPr lvl="0"/>
             <a:r>
-              <a:rPr lang="en-US" smtClean="0"/>
+              <a:rPr lang="en-US"/>
               <a:t>Click to edit Master text styles</a:t>
             </a:r>
           </a:p>
@@ -1721,38 +1723,37 @@
           <a:p>
             <a:pPr lvl="0"/>
             <a:r>
-              <a:rPr lang="en-US" smtClean="0"/>
+              <a:rPr lang="en-US"/>
               <a:t>Click to edit Master text styles</a:t>
             </a:r>
           </a:p>
           <a:p>
             <a:pPr lvl="1"/>
             <a:r>
-              <a:rPr lang="en-US" smtClean="0"/>
+              <a:rPr lang="en-US"/>
               <a:t>Second level</a:t>
             </a:r>
           </a:p>
           <a:p>
             <a:pPr lvl="2"/>
             <a:r>
-              <a:rPr lang="en-US" smtClean="0"/>
+              <a:rPr lang="en-US"/>
               <a:t>Third level</a:t>
             </a:r>
           </a:p>
           <a:p>
             <a:pPr lvl="3"/>
             <a:r>
-              <a:rPr lang="en-US" smtClean="0"/>
+              <a:rPr lang="en-US"/>
               <a:t>Fourth level</a:t>
             </a:r>
           </a:p>
           <a:p>
             <a:pPr lvl="4"/>
             <a:r>
-              <a:rPr lang="en-US" smtClean="0"/>
+              <a:rPr lang="en-US"/>
               <a:t>Fifth level</a:t>
             </a:r>
-            <a:endParaRPr lang="en-US"/>
           </a:p>
         </p:txBody>
       </p:sp>
@@ -1773,7 +1774,7 @@
           <a:p>
             <a:fld id="{5BCAD085-E8A6-8845-BD4E-CB4CCA059FC4}" type="datetimeFigureOut">
               <a:rPr lang="en-US" smtClean="0"/>
-              <a:t>1/27/13</a:t>
+              <a:t>7/25/2026</a:t>
             </a:fld>
             <a:endParaRPr lang="en-US"/>
           </a:p>
@@ -1867,10 +1868,9 @@
           <a:lstStyle/>
           <a:p>
             <a:r>
-              <a:rPr lang="en-US" smtClean="0"/>
+              <a:rPr lang="en-US"/>
               <a:t>Click to edit Master title style</a:t>
             </a:r>
-            <a:endParaRPr lang="en-US"/>
           </a:p>
         </p:txBody>
       </p:sp>
@@ -1891,7 +1891,7 @@
           <a:p>
             <a:fld id="{5BCAD085-E8A6-8845-BD4E-CB4CCA059FC4}" type="datetimeFigureOut">
               <a:rPr lang="en-US" smtClean="0"/>
-              <a:t>1/27/13</a:t>
+              <a:t>7/25/2026</a:t>
             </a:fld>
             <a:endParaRPr lang="en-US"/>
           </a:p>
@@ -1986,7 +1986,7 @@
           <a:p>
             <a:fld id="{5BCAD085-E8A6-8845-BD4E-CB4CCA059FC4}" type="datetimeFigureOut">
               <a:rPr lang="en-US" smtClean="0"/>
-              <a:t>1/27/13</a:t>
+              <a:t>7/25/2026</a:t>
             </a:fld>
             <a:endParaRPr lang="en-US"/>
           </a:p>
@@ -2089,10 +2089,9 @@
           </a:lstStyle>
           <a:p>
             <a:r>
-              <a:rPr lang="en-US" smtClean="0"/>
+              <a:rPr lang="en-US"/>
               <a:t>Click to edit Master title style</a:t>
             </a:r>
-            <a:endParaRPr lang="en-US"/>
           </a:p>
         </p:txBody>
       </p:sp>
@@ -2146,38 +2145,37 @@
           <a:p>
             <a:pPr lvl="0"/>
             <a:r>
-              <a:rPr lang="en-US" smtClean="0"/>
+              <a:rPr lang="en-US"/>
               <a:t>Click to edit Master text styles</a:t>
             </a:r>
           </a:p>
           <a:p>
             <a:pPr lvl="1"/>
             <a:r>
-              <a:rPr lang="en-US" smtClean="0"/>
+              <a:rPr lang="en-US"/>
               <a:t>Second level</a:t>
             </a:r>
           </a:p>
           <a:p>
             <a:pPr lvl="2"/>
             <a:r>
-              <a:rPr lang="en-US" smtClean="0"/>
+              <a:rPr lang="en-US"/>
               <a:t>Third level</a:t>
             </a:r>
           </a:p>
           <a:p>
             <a:pPr lvl="3"/>
             <a:r>
-              <a:rPr lang="en-US" smtClean="0"/>
+              <a:rPr lang="en-US"/>
               <a:t>Fourth level</a:t>
             </a:r>
           </a:p>
           <a:p>
             <a:pPr lvl="4"/>
             <a:r>
-              <a:rPr lang="en-US" smtClean="0"/>
+              <a:rPr lang="en-US"/>
               <a:t>Fifth level</a:t>
             </a:r>
-            <a:endParaRPr lang="en-US"/>
           </a:p>
         </p:txBody>
       </p:sp>
@@ -2240,7 +2238,7 @@
           <a:p>
             <a:pPr lvl="0"/>
             <a:r>
-              <a:rPr lang="en-US" smtClean="0"/>
+              <a:rPr lang="en-US"/>
               <a:t>Click to edit Master text styles</a:t>
             </a:r>
           </a:p>
@@ -2263,7 +2261,7 @@
           <a:p>
             <a:fld id="{5BCAD085-E8A6-8845-BD4E-CB4CCA059FC4}" type="datetimeFigureOut">
               <a:rPr lang="en-US" smtClean="0"/>
-              <a:t>1/27/13</a:t>
+              <a:t>7/25/2026</a:t>
             </a:fld>
             <a:endParaRPr lang="en-US"/>
           </a:p>
@@ -2366,10 +2364,9 @@
           </a:lstStyle>
           <a:p>
             <a:r>
-              <a:rPr lang="en-US" smtClean="0"/>
+              <a:rPr lang="en-US"/>
               <a:t>Click to edit Master title style</a:t>
             </a:r>
-            <a:endParaRPr lang="en-US"/>
           </a:p>
         </p:txBody>
       </p:sp>
@@ -2493,7 +2490,7 @@
           <a:p>
             <a:pPr lvl="0"/>
             <a:r>
-              <a:rPr lang="en-US" smtClean="0"/>
+              <a:rPr lang="en-US"/>
               <a:t>Click to edit Master text styles</a:t>
             </a:r>
           </a:p>
@@ -2516,7 +2513,7 @@
           <a:p>
             <a:fld id="{5BCAD085-E8A6-8845-BD4E-CB4CCA059FC4}" type="datetimeFigureOut">
               <a:rPr lang="en-US" smtClean="0"/>
-              <a:t>1/27/13</a:t>
+              <a:t>7/25/2026</a:t>
             </a:fld>
             <a:endParaRPr lang="en-US"/>
           </a:p>
@@ -2625,10 +2622,9 @@
           <a:lstStyle/>
           <a:p>
             <a:r>
-              <a:rPr lang="en-US" smtClean="0"/>
+              <a:rPr lang="en-US"/>
               <a:t>Click to edit Master title style</a:t>
             </a:r>
-            <a:endParaRPr lang="en-US"/>
           </a:p>
         </p:txBody>
       </p:sp>
@@ -2659,38 +2655,37 @@
           <a:p>
             <a:pPr lvl="0"/>
             <a:r>
-              <a:rPr lang="en-US" smtClean="0"/>
+              <a:rPr lang="en-US"/>
               <a:t>Click to edit Master text styles</a:t>
             </a:r>
           </a:p>
           <a:p>
             <a:pPr lvl="1"/>
             <a:r>
-              <a:rPr lang="en-US" smtClean="0"/>
+              <a:rPr lang="en-US"/>
               <a:t>Second level</a:t>
             </a:r>
           </a:p>
           <a:p>
             <a:pPr lvl="2"/>
             <a:r>
-              <a:rPr lang="en-US" smtClean="0"/>
+              <a:rPr lang="en-US"/>
               <a:t>Third level</a:t>
             </a:r>
           </a:p>
           <a:p>
             <a:pPr lvl="3"/>
             <a:r>
-              <a:rPr lang="en-US" smtClean="0"/>
+              <a:rPr lang="en-US"/>
               <a:t>Fourth level</a:t>
             </a:r>
           </a:p>
           <a:p>
             <a:pPr lvl="4"/>
             <a:r>
-              <a:rPr lang="en-US" smtClean="0"/>
+              <a:rPr lang="en-US"/>
               <a:t>Fifth level</a:t>
             </a:r>
-            <a:endParaRPr lang="en-US"/>
           </a:p>
         </p:txBody>
       </p:sp>
@@ -2729,7 +2724,7 @@
           <a:p>
             <a:fld id="{5BCAD085-E8A6-8845-BD4E-CB4CCA059FC4}" type="datetimeFigureOut">
               <a:rPr lang="en-US" smtClean="0"/>
-              <a:t>1/27/13</a:t>
+              <a:t>7/25/2026</a:t>
             </a:fld>
             <a:endParaRPr lang="en-US"/>
           </a:p>
@@ -3088,7 +3083,7 @@
 </file>
 
 <file path=ppt/slides/slide1.xml><?xml version="1.0" encoding="utf-8"?>
-<p:sld xmlns:a="http://schemas.openxmlformats.org/drawingml/2006/main" xmlns:p="http://schemas.openxmlformats.org/presentationml/2006/main" xmlns:r="http://schemas.openxmlformats.org/officeDocument/2006/relationships">
+<p:sld xmlns:a="http://schemas.openxmlformats.org/drawingml/2006/main" xmlns:r="http://schemas.openxmlformats.org/officeDocument/2006/relationships" xmlns:p="http://schemas.openxmlformats.org/presentationml/2006/main">
   <p:cSld>
     <p:spTree>
       <p:nvGrpSpPr>
@@ -3096,7 +3091,14 @@
         <p:cNvGrpSpPr/>
         <p:nvPr/>
       </p:nvGrpSpPr>
-      <p:grpSpPr/>
+      <p:grpSpPr>
+        <a:xfrm>
+          <a:off x="0" y="0"/>
+          <a:ext cx="0" cy="0"/>
+          <a:chOff x="0" y="0"/>
+          <a:chExt cx="0" cy="0"/>
+        </a:xfrm>
+      </p:grpSpPr>
       <p:sp>
         <p:nvSpPr>
           <p:cNvPr id="2" name="Rectangle 1"/>
@@ -3137,6 +3139,7 @@
           <a:lstStyle/>
           <a:p>
             <a:pPr algn="ctr"/>
+            <a:endParaRPr/>
           </a:p>
         </p:txBody>
       </p:sp>
@@ -3387,7 +3390,7 @@
 </file>
 
 <file path=ppt/slides/slide10.xml><?xml version="1.0" encoding="utf-8"?>
-<p:sld xmlns:a="http://schemas.openxmlformats.org/drawingml/2006/main" xmlns:p="http://schemas.openxmlformats.org/presentationml/2006/main" xmlns:r="http://schemas.openxmlformats.org/officeDocument/2006/relationships">
+<p:sld xmlns:a="http://schemas.openxmlformats.org/drawingml/2006/main" xmlns:r="http://schemas.openxmlformats.org/officeDocument/2006/relationships" xmlns:p="http://schemas.openxmlformats.org/presentationml/2006/main">
   <p:cSld>
     <p:spTree>
       <p:nvGrpSpPr>
@@ -3395,7 +3398,14 @@
         <p:cNvGrpSpPr/>
         <p:nvPr/>
       </p:nvGrpSpPr>
-      <p:grpSpPr/>
+      <p:grpSpPr>
+        <a:xfrm>
+          <a:off x="0" y="0"/>
+          <a:ext cx="0" cy="0"/>
+          <a:chOff x="0" y="0"/>
+          <a:chExt cx="0" cy="0"/>
+        </a:xfrm>
+      </p:grpSpPr>
       <p:sp>
         <p:nvSpPr>
           <p:cNvPr id="2" name="Rectangle 1"/>
@@ -3436,6 +3446,7 @@
           <a:lstStyle/>
           <a:p>
             <a:pPr algn="ctr"/>
+            <a:endParaRPr/>
           </a:p>
         </p:txBody>
       </p:sp>
@@ -3720,7 +3731,7 @@
 </file>
 
 <file path=ppt/slides/slide2.xml><?xml version="1.0" encoding="utf-8"?>
-<p:sld xmlns:a="http://schemas.openxmlformats.org/drawingml/2006/main" xmlns:p="http://schemas.openxmlformats.org/presentationml/2006/main" xmlns:r="http://schemas.openxmlformats.org/officeDocument/2006/relationships">
+<p:sld xmlns:a="http://schemas.openxmlformats.org/drawingml/2006/main" xmlns:r="http://schemas.openxmlformats.org/officeDocument/2006/relationships" xmlns:p="http://schemas.openxmlformats.org/presentationml/2006/main">
   <p:cSld>
     <p:spTree>
       <p:nvGrpSpPr>
@@ -3728,7 +3739,14 @@
         <p:cNvGrpSpPr/>
         <p:nvPr/>
       </p:nvGrpSpPr>
-      <p:grpSpPr/>
+      <p:grpSpPr>
+        <a:xfrm>
+          <a:off x="0" y="0"/>
+          <a:ext cx="0" cy="0"/>
+          <a:chOff x="0" y="0"/>
+          <a:chExt cx="0" cy="0"/>
+        </a:xfrm>
+      </p:grpSpPr>
       <p:sp>
         <p:nvSpPr>
           <p:cNvPr id="2" name="Rectangle 1"/>
@@ -3769,6 +3787,7 @@
           <a:lstStyle/>
           <a:p>
             <a:pPr algn="ctr"/>
+            <a:endParaRPr/>
           </a:p>
         </p:txBody>
       </p:sp>
@@ -3878,7 +3897,7 @@
           </a:fontRef>
         </p:style>
         <p:txBody>
-          <a:bodyPr rtlCol="0" anchor="ctr" wrap="square"/>
+          <a:bodyPr wrap="square" rtlCol="0" anchor="ctr"/>
           <a:lstStyle/>
           <a:p>
             <a:pPr algn="ctr"/>
@@ -3967,7 +3986,7 @@
           </a:fontRef>
         </p:style>
         <p:txBody>
-          <a:bodyPr rtlCol="0" anchor="ctr" wrap="square"/>
+          <a:bodyPr wrap="square" rtlCol="0" anchor="ctr"/>
           <a:lstStyle/>
           <a:p>
             <a:pPr algn="ctr"/>
@@ -4056,7 +4075,7 @@
           </a:fontRef>
         </p:style>
         <p:txBody>
-          <a:bodyPr rtlCol="0" anchor="ctr" wrap="square"/>
+          <a:bodyPr wrap="square" rtlCol="0" anchor="ctr"/>
           <a:lstStyle/>
           <a:p>
             <a:pPr algn="ctr"/>
@@ -4145,7 +4164,7 @@
           </a:fontRef>
         </p:style>
         <p:txBody>
-          <a:bodyPr rtlCol="0" anchor="ctr" wrap="square"/>
+          <a:bodyPr wrap="square" rtlCol="0" anchor="ctr"/>
           <a:lstStyle/>
           <a:p>
             <a:pPr algn="ctr"/>
@@ -4234,7 +4253,7 @@
           </a:fontRef>
         </p:style>
         <p:txBody>
-          <a:bodyPr rtlCol="0" anchor="ctr" wrap="square"/>
+          <a:bodyPr wrap="square" rtlCol="0" anchor="ctr"/>
           <a:lstStyle/>
           <a:p>
             <a:pPr algn="ctr"/>
@@ -4257,7 +4276,13 @@
           <p:cNvGraphicFramePr>
             <a:graphicFrameLocks noGrp="1"/>
           </p:cNvGraphicFramePr>
-          <p:nvPr/>
+          <p:nvPr>
+            <p:extLst>
+              <p:ext uri="{D42A27DB-BD31-4B8C-83A1-F6EECF244321}">
+                <p14:modId xmlns:p14="http://schemas.microsoft.com/office/powerpoint/2010/main" val="1159292982"/>
+              </p:ext>
+            </p:extLst>
+          </p:nvPr>
         </p:nvGraphicFramePr>
         <p:xfrm>
           <a:off x="411480" y="2560320"/>
@@ -4270,9 +4295,27 @@
                 <a:tableStyleId>{5C22544A-7EE6-4342-B048-85BDC9FD1C3A}</a:tableStyleId>
               </a:tblPr>
               <a:tblGrid>
-                <a:gridCol w="2011680"/>
-                <a:gridCol w="5943600"/>
-                <a:gridCol w="3200400"/>
+                <a:gridCol w="2011680">
+                  <a:extLst>
+                    <a:ext uri="{9D8B030D-6E8A-4147-A177-3AD203B41FA5}">
+                      <a16:colId xmlns:a16="http://schemas.microsoft.com/office/drawing/2014/main" val="20000"/>
+                    </a:ext>
+                  </a:extLst>
+                </a:gridCol>
+                <a:gridCol w="5943600">
+                  <a:extLst>
+                    <a:ext uri="{9D8B030D-6E8A-4147-A177-3AD203B41FA5}">
+                      <a16:colId xmlns:a16="http://schemas.microsoft.com/office/drawing/2014/main" val="20001"/>
+                    </a:ext>
+                  </a:extLst>
+                </a:gridCol>
+                <a:gridCol w="3200400">
+                  <a:extLst>
+                    <a:ext uri="{9D8B030D-6E8A-4147-A177-3AD203B41FA5}">
+                      <a16:colId xmlns:a16="http://schemas.microsoft.com/office/drawing/2014/main" val="20002"/>
+                    </a:ext>
+                  </a:extLst>
+                </a:gridCol>
               </a:tblGrid>
               <a:tr h="405384">
                 <a:tc>
@@ -4291,7 +4334,7 @@
                       </a:r>
                     </a:p>
                   </a:txBody>
-                  <a:tcPr>
+                  <a:tcPr anchor="ctr">
                     <a:solidFill>
                       <a:srgbClr val="0F172A"/>
                     </a:solidFill>
@@ -4313,7 +4356,7 @@
                       </a:r>
                     </a:p>
                   </a:txBody>
-                  <a:tcPr>
+                  <a:tcPr anchor="ctr">
                     <a:solidFill>
                       <a:srgbClr val="0F172A"/>
                     </a:solidFill>
@@ -4335,12 +4378,17 @@
                       </a:r>
                     </a:p>
                   </a:txBody>
-                  <a:tcPr>
+                  <a:tcPr anchor="ctr">
                     <a:solidFill>
                       <a:srgbClr val="0F172A"/>
                     </a:solidFill>
                   </a:tcPr>
                 </a:tc>
+                <a:extLst>
+                  <a:ext uri="{0D108BD9-81ED-4DB2-BD59-A6C34878D82A}">
+                    <a16:rowId xmlns:a16="http://schemas.microsoft.com/office/drawing/2014/main" val="10000"/>
+                  </a:ext>
+                </a:extLst>
               </a:tr>
               <a:tr h="405384">
                 <a:tc>
@@ -4359,7 +4407,7 @@
                       </a:r>
                     </a:p>
                   </a:txBody>
-                  <a:tcPr/>
+                  <a:tcPr anchor="ctr"/>
                 </a:tc>
                 <a:tc>
                   <a:txBody>
@@ -4377,7 +4425,7 @@
                       </a:r>
                     </a:p>
                   </a:txBody>
-                  <a:tcPr/>
+                  <a:tcPr anchor="ctr"/>
                 </a:tc>
                 <a:tc>
                   <a:txBody>
@@ -4395,8 +4443,13 @@
                       </a:r>
                     </a:p>
                   </a:txBody>
-                  <a:tcPr/>
+                  <a:tcPr anchor="ctr"/>
                 </a:tc>
+                <a:extLst>
+                  <a:ext uri="{0D108BD9-81ED-4DB2-BD59-A6C34878D82A}">
+                    <a16:rowId xmlns:a16="http://schemas.microsoft.com/office/drawing/2014/main" val="10001"/>
+                  </a:ext>
+                </a:extLst>
               </a:tr>
               <a:tr h="405384">
                 <a:tc>
@@ -4415,7 +4468,7 @@
                       </a:r>
                     </a:p>
                   </a:txBody>
-                  <a:tcPr>
+                  <a:tcPr anchor="ctr">
                     <a:solidFill>
                       <a:srgbClr val="F8FAFC"/>
                     </a:solidFill>
@@ -4437,7 +4490,7 @@
                       </a:r>
                     </a:p>
                   </a:txBody>
-                  <a:tcPr>
+                  <a:tcPr anchor="ctr">
                     <a:solidFill>
                       <a:srgbClr val="F8FAFC"/>
                     </a:solidFill>
@@ -4459,12 +4512,17 @@
                       </a:r>
                     </a:p>
                   </a:txBody>
-                  <a:tcPr>
+                  <a:tcPr anchor="ctr">
                     <a:solidFill>
                       <a:srgbClr val="F8FAFC"/>
                     </a:solidFill>
                   </a:tcPr>
                 </a:tc>
+                <a:extLst>
+                  <a:ext uri="{0D108BD9-81ED-4DB2-BD59-A6C34878D82A}">
+                    <a16:rowId xmlns:a16="http://schemas.microsoft.com/office/drawing/2014/main" val="10002"/>
+                  </a:ext>
+                </a:extLst>
               </a:tr>
               <a:tr h="405384">
                 <a:tc>
@@ -4483,7 +4541,7 @@
                       </a:r>
                     </a:p>
                   </a:txBody>
-                  <a:tcPr/>
+                  <a:tcPr anchor="ctr"/>
                 </a:tc>
                 <a:tc>
                   <a:txBody>
@@ -4501,7 +4559,7 @@
                       </a:r>
                     </a:p>
                   </a:txBody>
-                  <a:tcPr/>
+                  <a:tcPr anchor="ctr"/>
                 </a:tc>
                 <a:tc>
                   <a:txBody>
@@ -4519,8 +4577,13 @@
                       </a:r>
                     </a:p>
                   </a:txBody>
-                  <a:tcPr/>
+                  <a:tcPr anchor="ctr"/>
                 </a:tc>
+                <a:extLst>
+                  <a:ext uri="{0D108BD9-81ED-4DB2-BD59-A6C34878D82A}">
+                    <a16:rowId xmlns:a16="http://schemas.microsoft.com/office/drawing/2014/main" val="10003"/>
+                  </a:ext>
+                </a:extLst>
               </a:tr>
               <a:tr h="405384">
                 <a:tc>
@@ -4539,7 +4602,7 @@
                       </a:r>
                     </a:p>
                   </a:txBody>
-                  <a:tcPr>
+                  <a:tcPr anchor="ctr">
                     <a:solidFill>
                       <a:srgbClr val="F8FAFC"/>
                     </a:solidFill>
@@ -4561,7 +4624,7 @@
                       </a:r>
                     </a:p>
                   </a:txBody>
-                  <a:tcPr>
+                  <a:tcPr anchor="ctr">
                     <a:solidFill>
                       <a:srgbClr val="F8FAFC"/>
                     </a:solidFill>
@@ -4583,12 +4646,17 @@
                       </a:r>
                     </a:p>
                   </a:txBody>
-                  <a:tcPr>
+                  <a:tcPr anchor="ctr">
                     <a:solidFill>
                       <a:srgbClr val="F8FAFC"/>
                     </a:solidFill>
                   </a:tcPr>
                 </a:tc>
+                <a:extLst>
+                  <a:ext uri="{0D108BD9-81ED-4DB2-BD59-A6C34878D82A}">
+                    <a16:rowId xmlns:a16="http://schemas.microsoft.com/office/drawing/2014/main" val="10004"/>
+                  </a:ext>
+                </a:extLst>
               </a:tr>
               <a:tr h="405384">
                 <a:tc>
@@ -4607,7 +4675,7 @@
                       </a:r>
                     </a:p>
                   </a:txBody>
-                  <a:tcPr/>
+                  <a:tcPr anchor="ctr"/>
                 </a:tc>
                 <a:tc>
                   <a:txBody>
@@ -4625,7 +4693,7 @@
                       </a:r>
                     </a:p>
                   </a:txBody>
-                  <a:tcPr/>
+                  <a:tcPr anchor="ctr"/>
                 </a:tc>
                 <a:tc>
                   <a:txBody>
@@ -4633,7 +4701,7 @@
                     <a:lstStyle/>
                     <a:p>
                       <a:r>
-                        <a:rPr sz="1000">
+                        <a:rPr sz="1000" dirty="0">
                           <a:solidFill>
                             <a:srgbClr val="0F172A"/>
                           </a:solidFill>
@@ -4643,8 +4711,13 @@
                       </a:r>
                     </a:p>
                   </a:txBody>
-                  <a:tcPr/>
+                  <a:tcPr anchor="ctr"/>
                 </a:tc>
+                <a:extLst>
+                  <a:ext uri="{0D108BD9-81ED-4DB2-BD59-A6C34878D82A}">
+                    <a16:rowId xmlns:a16="http://schemas.microsoft.com/office/drawing/2014/main" val="10005"/>
+                  </a:ext>
+                </a:extLst>
               </a:tr>
             </a:tbl>
           </a:graphicData>
@@ -4693,7 +4766,7 @@
 </file>
 
 <file path=ppt/slides/slide3.xml><?xml version="1.0" encoding="utf-8"?>
-<p:sld xmlns:a="http://schemas.openxmlformats.org/drawingml/2006/main" xmlns:p="http://schemas.openxmlformats.org/presentationml/2006/main" xmlns:r="http://schemas.openxmlformats.org/officeDocument/2006/relationships">
+<p:sld xmlns:a="http://schemas.openxmlformats.org/drawingml/2006/main" xmlns:r="http://schemas.openxmlformats.org/officeDocument/2006/relationships" xmlns:p="http://schemas.openxmlformats.org/presentationml/2006/main">
   <p:cSld>
     <p:spTree>
       <p:nvGrpSpPr>
@@ -4701,7 +4774,14 @@
         <p:cNvGrpSpPr/>
         <p:nvPr/>
       </p:nvGrpSpPr>
-      <p:grpSpPr/>
+      <p:grpSpPr>
+        <a:xfrm>
+          <a:off x="0" y="0"/>
+          <a:ext cx="0" cy="0"/>
+          <a:chOff x="0" y="0"/>
+          <a:chExt cx="0" cy="0"/>
+        </a:xfrm>
+      </p:grpSpPr>
       <p:sp>
         <p:nvSpPr>
           <p:cNvPr id="2" name="Rectangle 1"/>
@@ -4742,6 +4822,7 @@
           <a:lstStyle/>
           <a:p>
             <a:pPr algn="ctr"/>
+            <a:endParaRPr/>
           </a:p>
         </p:txBody>
       </p:sp>
@@ -4819,7 +4900,13 @@
           <p:cNvGraphicFramePr>
             <a:graphicFrameLocks noGrp="1"/>
           </p:cNvGraphicFramePr>
-          <p:nvPr/>
+          <p:nvPr>
+            <p:extLst>
+              <p:ext uri="{D42A27DB-BD31-4B8C-83A1-F6EECF244321}">
+                <p14:modId xmlns:p14="http://schemas.microsoft.com/office/powerpoint/2010/main" val="3580710764"/>
+              </p:ext>
+            </p:extLst>
+          </p:nvPr>
         </p:nvGraphicFramePr>
         <p:xfrm>
           <a:off x="411480" y="1371600"/>
@@ -4832,10 +4919,34 @@
                 <a:tableStyleId>{5C22544A-7EE6-4342-B048-85BDC9FD1C3A}</a:tableStyleId>
               </a:tblPr>
               <a:tblGrid>
-                <a:gridCol w="2743200"/>
-                <a:gridCol w="2834640"/>
-                <a:gridCol w="2834640"/>
-                <a:gridCol w="2834640"/>
+                <a:gridCol w="2743200">
+                  <a:extLst>
+                    <a:ext uri="{9D8B030D-6E8A-4147-A177-3AD203B41FA5}">
+                      <a16:colId xmlns:a16="http://schemas.microsoft.com/office/drawing/2014/main" val="20000"/>
+                    </a:ext>
+                  </a:extLst>
+                </a:gridCol>
+                <a:gridCol w="2834640">
+                  <a:extLst>
+                    <a:ext uri="{9D8B030D-6E8A-4147-A177-3AD203B41FA5}">
+                      <a16:colId xmlns:a16="http://schemas.microsoft.com/office/drawing/2014/main" val="20001"/>
+                    </a:ext>
+                  </a:extLst>
+                </a:gridCol>
+                <a:gridCol w="2834640">
+                  <a:extLst>
+                    <a:ext uri="{9D8B030D-6E8A-4147-A177-3AD203B41FA5}">
+                      <a16:colId xmlns:a16="http://schemas.microsoft.com/office/drawing/2014/main" val="20002"/>
+                    </a:ext>
+                  </a:extLst>
+                </a:gridCol>
+                <a:gridCol w="2834640">
+                  <a:extLst>
+                    <a:ext uri="{9D8B030D-6E8A-4147-A177-3AD203B41FA5}">
+                      <a16:colId xmlns:a16="http://schemas.microsoft.com/office/drawing/2014/main" val="20003"/>
+                    </a:ext>
+                  </a:extLst>
+                </a:gridCol>
               </a:tblGrid>
               <a:tr h="382219">
                 <a:tc>
@@ -4854,7 +4965,7 @@
                       </a:r>
                     </a:p>
                   </a:txBody>
-                  <a:tcPr>
+                  <a:tcPr anchor="ctr">
                     <a:solidFill>
                       <a:srgbClr val="0F172A"/>
                     </a:solidFill>
@@ -4876,7 +4987,7 @@
                       </a:r>
                     </a:p>
                   </a:txBody>
-                  <a:tcPr>
+                  <a:tcPr anchor="ctr">
                     <a:solidFill>
                       <a:srgbClr val="0F172A"/>
                     </a:solidFill>
@@ -4898,7 +5009,7 @@
                       </a:r>
                     </a:p>
                   </a:txBody>
-                  <a:tcPr>
+                  <a:tcPr anchor="ctr">
                     <a:solidFill>
                       <a:srgbClr val="0F172A"/>
                     </a:solidFill>
@@ -4920,12 +5031,17 @@
                       </a:r>
                     </a:p>
                   </a:txBody>
-                  <a:tcPr>
+                  <a:tcPr anchor="ctr">
                     <a:solidFill>
                       <a:srgbClr val="0F172A"/>
                     </a:solidFill>
                   </a:tcPr>
                 </a:tc>
+                <a:extLst>
+                  <a:ext uri="{0D108BD9-81ED-4DB2-BD59-A6C34878D82A}">
+                    <a16:rowId xmlns:a16="http://schemas.microsoft.com/office/drawing/2014/main" val="10000"/>
+                  </a:ext>
+                </a:extLst>
               </a:tr>
               <a:tr h="382219">
                 <a:tc>
@@ -4944,7 +5060,7 @@
                       </a:r>
                     </a:p>
                   </a:txBody>
-                  <a:tcPr/>
+                  <a:tcPr anchor="ctr"/>
                 </a:tc>
                 <a:tc>
                   <a:txBody>
@@ -4962,7 +5078,7 @@
                       </a:r>
                     </a:p>
                   </a:txBody>
-                  <a:tcPr/>
+                  <a:tcPr anchor="ctr"/>
                 </a:tc>
                 <a:tc>
                   <a:txBody>
@@ -4980,7 +5096,7 @@
                       </a:r>
                     </a:p>
                   </a:txBody>
-                  <a:tcPr/>
+                  <a:tcPr anchor="ctr"/>
                 </a:tc>
                 <a:tc>
                   <a:txBody>
@@ -4998,8 +5114,13 @@
                       </a:r>
                     </a:p>
                   </a:txBody>
-                  <a:tcPr/>
+                  <a:tcPr anchor="ctr"/>
                 </a:tc>
+                <a:extLst>
+                  <a:ext uri="{0D108BD9-81ED-4DB2-BD59-A6C34878D82A}">
+                    <a16:rowId xmlns:a16="http://schemas.microsoft.com/office/drawing/2014/main" val="10001"/>
+                  </a:ext>
+                </a:extLst>
               </a:tr>
               <a:tr h="382219">
                 <a:tc>
@@ -5018,7 +5139,7 @@
                       </a:r>
                     </a:p>
                   </a:txBody>
-                  <a:tcPr>
+                  <a:tcPr anchor="ctr">
                     <a:solidFill>
                       <a:srgbClr val="F8FAFC"/>
                     </a:solidFill>
@@ -5040,7 +5161,7 @@
                       </a:r>
                     </a:p>
                   </a:txBody>
-                  <a:tcPr>
+                  <a:tcPr anchor="ctr">
                     <a:solidFill>
                       <a:srgbClr val="F8FAFC"/>
                     </a:solidFill>
@@ -5062,7 +5183,7 @@
                       </a:r>
                     </a:p>
                   </a:txBody>
-                  <a:tcPr>
+                  <a:tcPr anchor="ctr">
                     <a:solidFill>
                       <a:srgbClr val="F8FAFC"/>
                     </a:solidFill>
@@ -5084,12 +5205,17 @@
                       </a:r>
                     </a:p>
                   </a:txBody>
-                  <a:tcPr>
+                  <a:tcPr anchor="ctr">
                     <a:solidFill>
                       <a:srgbClr val="F8FAFC"/>
                     </a:solidFill>
                   </a:tcPr>
                 </a:tc>
+                <a:extLst>
+                  <a:ext uri="{0D108BD9-81ED-4DB2-BD59-A6C34878D82A}">
+                    <a16:rowId xmlns:a16="http://schemas.microsoft.com/office/drawing/2014/main" val="10002"/>
+                  </a:ext>
+                </a:extLst>
               </a:tr>
               <a:tr h="382219">
                 <a:tc>
@@ -5108,7 +5234,7 @@
                       </a:r>
                     </a:p>
                   </a:txBody>
-                  <a:tcPr/>
+                  <a:tcPr anchor="ctr"/>
                 </a:tc>
                 <a:tc>
                   <a:txBody>
@@ -5126,7 +5252,7 @@
                       </a:r>
                     </a:p>
                   </a:txBody>
-                  <a:tcPr/>
+                  <a:tcPr anchor="ctr"/>
                 </a:tc>
                 <a:tc>
                   <a:txBody>
@@ -5144,7 +5270,7 @@
                       </a:r>
                     </a:p>
                   </a:txBody>
-                  <a:tcPr/>
+                  <a:tcPr anchor="ctr"/>
                 </a:tc>
                 <a:tc>
                   <a:txBody>
@@ -5162,8 +5288,13 @@
                       </a:r>
                     </a:p>
                   </a:txBody>
-                  <a:tcPr/>
+                  <a:tcPr anchor="ctr"/>
                 </a:tc>
+                <a:extLst>
+                  <a:ext uri="{0D108BD9-81ED-4DB2-BD59-A6C34878D82A}">
+                    <a16:rowId xmlns:a16="http://schemas.microsoft.com/office/drawing/2014/main" val="10003"/>
+                  </a:ext>
+                </a:extLst>
               </a:tr>
               <a:tr h="382219">
                 <a:tc>
@@ -5182,7 +5313,7 @@
                       </a:r>
                     </a:p>
                   </a:txBody>
-                  <a:tcPr>
+                  <a:tcPr anchor="ctr">
                     <a:solidFill>
                       <a:srgbClr val="F8FAFC"/>
                     </a:solidFill>
@@ -5204,7 +5335,7 @@
                       </a:r>
                     </a:p>
                   </a:txBody>
-                  <a:tcPr>
+                  <a:tcPr anchor="ctr">
                     <a:solidFill>
                       <a:srgbClr val="F8FAFC"/>
                     </a:solidFill>
@@ -5226,7 +5357,7 @@
                       </a:r>
                     </a:p>
                   </a:txBody>
-                  <a:tcPr>
+                  <a:tcPr anchor="ctr">
                     <a:solidFill>
                       <a:srgbClr val="F8FAFC"/>
                     </a:solidFill>
@@ -5248,12 +5379,17 @@
                       </a:r>
                     </a:p>
                   </a:txBody>
-                  <a:tcPr>
+                  <a:tcPr anchor="ctr">
                     <a:solidFill>
                       <a:srgbClr val="F8FAFC"/>
                     </a:solidFill>
                   </a:tcPr>
                 </a:tc>
+                <a:extLst>
+                  <a:ext uri="{0D108BD9-81ED-4DB2-BD59-A6C34878D82A}">
+                    <a16:rowId xmlns:a16="http://schemas.microsoft.com/office/drawing/2014/main" val="10004"/>
+                  </a:ext>
+                </a:extLst>
               </a:tr>
               <a:tr h="382219">
                 <a:tc>
@@ -5272,7 +5408,7 @@
                       </a:r>
                     </a:p>
                   </a:txBody>
-                  <a:tcPr/>
+                  <a:tcPr anchor="ctr"/>
                 </a:tc>
                 <a:tc>
                   <a:txBody>
@@ -5290,7 +5426,7 @@
                       </a:r>
                     </a:p>
                   </a:txBody>
-                  <a:tcPr/>
+                  <a:tcPr anchor="ctr"/>
                 </a:tc>
                 <a:tc>
                   <a:txBody>
@@ -5308,7 +5444,7 @@
                       </a:r>
                     </a:p>
                   </a:txBody>
-                  <a:tcPr/>
+                  <a:tcPr anchor="ctr"/>
                 </a:tc>
                 <a:tc>
                   <a:txBody>
@@ -5326,8 +5462,13 @@
                       </a:r>
                     </a:p>
                   </a:txBody>
-                  <a:tcPr/>
+                  <a:tcPr anchor="ctr"/>
                 </a:tc>
+                <a:extLst>
+                  <a:ext uri="{0D108BD9-81ED-4DB2-BD59-A6C34878D82A}">
+                    <a16:rowId xmlns:a16="http://schemas.microsoft.com/office/drawing/2014/main" val="10005"/>
+                  </a:ext>
+                </a:extLst>
               </a:tr>
               <a:tr h="382219">
                 <a:tc>
@@ -5346,7 +5487,7 @@
                       </a:r>
                     </a:p>
                   </a:txBody>
-                  <a:tcPr>
+                  <a:tcPr anchor="ctr">
                     <a:solidFill>
                       <a:srgbClr val="F8FAFC"/>
                     </a:solidFill>
@@ -5368,7 +5509,7 @@
                       </a:r>
                     </a:p>
                   </a:txBody>
-                  <a:tcPr>
+                  <a:tcPr anchor="ctr">
                     <a:solidFill>
                       <a:srgbClr val="F8FAFC"/>
                     </a:solidFill>
@@ -5390,7 +5531,7 @@
                       </a:r>
                     </a:p>
                   </a:txBody>
-                  <a:tcPr>
+                  <a:tcPr anchor="ctr">
                     <a:solidFill>
                       <a:srgbClr val="F8FAFC"/>
                     </a:solidFill>
@@ -5412,12 +5553,17 @@
                       </a:r>
                     </a:p>
                   </a:txBody>
-                  <a:tcPr>
+                  <a:tcPr anchor="ctr">
                     <a:solidFill>
                       <a:srgbClr val="F8FAFC"/>
                     </a:solidFill>
                   </a:tcPr>
                 </a:tc>
+                <a:extLst>
+                  <a:ext uri="{0D108BD9-81ED-4DB2-BD59-A6C34878D82A}">
+                    <a16:rowId xmlns:a16="http://schemas.microsoft.com/office/drawing/2014/main" val="10006"/>
+                  </a:ext>
+                </a:extLst>
               </a:tr>
               <a:tr h="382219">
                 <a:tc>
@@ -5436,7 +5582,7 @@
                       </a:r>
                     </a:p>
                   </a:txBody>
-                  <a:tcPr/>
+                  <a:tcPr anchor="ctr"/>
                 </a:tc>
                 <a:tc>
                   <a:txBody>
@@ -5454,7 +5600,7 @@
                       </a:r>
                     </a:p>
                   </a:txBody>
-                  <a:tcPr/>
+                  <a:tcPr anchor="ctr"/>
                 </a:tc>
                 <a:tc>
                   <a:txBody>
@@ -5472,7 +5618,7 @@
                       </a:r>
                     </a:p>
                   </a:txBody>
-                  <a:tcPr/>
+                  <a:tcPr anchor="ctr"/>
                 </a:tc>
                 <a:tc>
                   <a:txBody>
@@ -5490,8 +5636,13 @@
                       </a:r>
                     </a:p>
                   </a:txBody>
-                  <a:tcPr/>
+                  <a:tcPr anchor="ctr"/>
                 </a:tc>
+                <a:extLst>
+                  <a:ext uri="{0D108BD9-81ED-4DB2-BD59-A6C34878D82A}">
+                    <a16:rowId xmlns:a16="http://schemas.microsoft.com/office/drawing/2014/main" val="10007"/>
+                  </a:ext>
+                </a:extLst>
               </a:tr>
               <a:tr h="382219">
                 <a:tc>
@@ -5510,7 +5661,7 @@
                       </a:r>
                     </a:p>
                   </a:txBody>
-                  <a:tcPr>
+                  <a:tcPr anchor="ctr">
                     <a:solidFill>
                       <a:srgbClr val="F8FAFC"/>
                     </a:solidFill>
@@ -5532,7 +5683,7 @@
                       </a:r>
                     </a:p>
                   </a:txBody>
-                  <a:tcPr>
+                  <a:tcPr anchor="ctr">
                     <a:solidFill>
                       <a:srgbClr val="F8FAFC"/>
                     </a:solidFill>
@@ -5554,7 +5705,7 @@
                       </a:r>
                     </a:p>
                   </a:txBody>
-                  <a:tcPr>
+                  <a:tcPr anchor="ctr">
                     <a:solidFill>
                       <a:srgbClr val="F8FAFC"/>
                     </a:solidFill>
@@ -5576,12 +5727,17 @@
                       </a:r>
                     </a:p>
                   </a:txBody>
-                  <a:tcPr>
+                  <a:tcPr anchor="ctr">
                     <a:solidFill>
                       <a:srgbClr val="F8FAFC"/>
                     </a:solidFill>
                   </a:tcPr>
                 </a:tc>
+                <a:extLst>
+                  <a:ext uri="{0D108BD9-81ED-4DB2-BD59-A6C34878D82A}">
+                    <a16:rowId xmlns:a16="http://schemas.microsoft.com/office/drawing/2014/main" val="10008"/>
+                  </a:ext>
+                </a:extLst>
               </a:tr>
               <a:tr h="382220">
                 <a:tc>
@@ -5600,7 +5756,7 @@
                       </a:r>
                     </a:p>
                   </a:txBody>
-                  <a:tcPr/>
+                  <a:tcPr anchor="ctr"/>
                 </a:tc>
                 <a:tc>
                   <a:txBody>
@@ -5618,7 +5774,7 @@
                       </a:r>
                     </a:p>
                   </a:txBody>
-                  <a:tcPr/>
+                  <a:tcPr anchor="ctr"/>
                 </a:tc>
                 <a:tc>
                   <a:txBody>
@@ -5636,7 +5792,7 @@
                       </a:r>
                     </a:p>
                   </a:txBody>
-                  <a:tcPr/>
+                  <a:tcPr anchor="ctr"/>
                 </a:tc>
                 <a:tc>
                   <a:txBody>
@@ -5644,7 +5800,7 @@
                     <a:lstStyle/>
                     <a:p>
                       <a:r>
-                        <a:rPr sz="1100">
+                        <a:rPr sz="1100" dirty="0" err="1">
                           <a:solidFill>
                             <a:srgbClr val="0F172A"/>
                           </a:solidFill>
@@ -5652,10 +5808,21 @@
                         </a:rPr>
                         <a:t>amount×배당</a:t>
                       </a:r>
+                      <a:endParaRPr sz="1100" dirty="0">
+                        <a:solidFill>
+                          <a:srgbClr val="0F172A"/>
+                        </a:solidFill>
+                        <a:latin typeface="Malgun Gothic"/>
+                      </a:endParaRPr>
                     </a:p>
                   </a:txBody>
-                  <a:tcPr/>
+                  <a:tcPr anchor="ctr"/>
                 </a:tc>
+                <a:extLst>
+                  <a:ext uri="{0D108BD9-81ED-4DB2-BD59-A6C34878D82A}">
+                    <a16:rowId xmlns:a16="http://schemas.microsoft.com/office/drawing/2014/main" val="10009"/>
+                  </a:ext>
+                </a:extLst>
               </a:tr>
             </a:tbl>
           </a:graphicData>
@@ -5704,7 +5871,7 @@
 </file>
 
 <file path=ppt/slides/slide4.xml><?xml version="1.0" encoding="utf-8"?>
-<p:sld xmlns:a="http://schemas.openxmlformats.org/drawingml/2006/main" xmlns:p="http://schemas.openxmlformats.org/presentationml/2006/main" xmlns:r="http://schemas.openxmlformats.org/officeDocument/2006/relationships">
+<p:sld xmlns:a="http://schemas.openxmlformats.org/drawingml/2006/main" xmlns:r="http://schemas.openxmlformats.org/officeDocument/2006/relationships" xmlns:p="http://schemas.openxmlformats.org/presentationml/2006/main">
   <p:cSld>
     <p:spTree>
       <p:nvGrpSpPr>
@@ -5712,7 +5879,14 @@
         <p:cNvGrpSpPr/>
         <p:nvPr/>
       </p:nvGrpSpPr>
-      <p:grpSpPr/>
+      <p:grpSpPr>
+        <a:xfrm>
+          <a:off x="0" y="0"/>
+          <a:ext cx="0" cy="0"/>
+          <a:chOff x="0" y="0"/>
+          <a:chExt cx="0" cy="0"/>
+        </a:xfrm>
+      </p:grpSpPr>
       <p:sp>
         <p:nvSpPr>
           <p:cNvPr id="2" name="Rectangle 1"/>
@@ -5753,6 +5927,7 @@
           <a:lstStyle/>
           <a:p>
             <a:pPr algn="ctr"/>
+            <a:endParaRPr/>
           </a:p>
         </p:txBody>
       </p:sp>
@@ -5862,7 +6037,7 @@
           </a:fontRef>
         </p:style>
         <p:txBody>
-          <a:bodyPr rtlCol="0" anchor="ctr" wrap="square"/>
+          <a:bodyPr wrap="square" rtlCol="0" anchor="ctr"/>
           <a:lstStyle/>
           <a:p>
             <a:pPr algn="ctr"/>
@@ -5951,7 +6126,7 @@
           </a:fontRef>
         </p:style>
         <p:txBody>
-          <a:bodyPr rtlCol="0" anchor="ctr" wrap="square"/>
+          <a:bodyPr wrap="square" rtlCol="0" anchor="ctr"/>
           <a:lstStyle/>
           <a:p>
             <a:pPr algn="ctr"/>
@@ -6039,7 +6214,7 @@
           </a:fontRef>
         </p:style>
         <p:txBody>
-          <a:bodyPr rtlCol="0" anchor="ctr" wrap="square"/>
+          <a:bodyPr wrap="square" rtlCol="0" anchor="ctr"/>
           <a:lstStyle/>
           <a:p>
             <a:pPr algn="ctr"/>
@@ -6128,7 +6303,7 @@
           </a:fontRef>
         </p:style>
         <p:txBody>
-          <a:bodyPr rtlCol="0" anchor="ctr" wrap="square"/>
+          <a:bodyPr wrap="square" rtlCol="0" anchor="ctr"/>
           <a:lstStyle/>
           <a:p>
             <a:pPr algn="ctr"/>
@@ -6217,7 +6392,7 @@
           </a:fontRef>
         </p:style>
         <p:txBody>
-          <a:bodyPr rtlCol="0" anchor="ctr" wrap="square"/>
+          <a:bodyPr wrap="square" rtlCol="0" anchor="ctr"/>
           <a:lstStyle/>
           <a:p>
             <a:pPr algn="ctr"/>
@@ -6306,7 +6481,7 @@
           </a:fontRef>
         </p:style>
         <p:txBody>
-          <a:bodyPr rtlCol="0" anchor="ctr" wrap="square"/>
+          <a:bodyPr wrap="square" rtlCol="0" anchor="ctr"/>
           <a:lstStyle/>
           <a:p>
             <a:pPr algn="ctr"/>
@@ -6536,7 +6711,7 @@
 </file>
 
 <file path=ppt/slides/slide5.xml><?xml version="1.0" encoding="utf-8"?>
-<p:sld xmlns:a="http://schemas.openxmlformats.org/drawingml/2006/main" xmlns:p="http://schemas.openxmlformats.org/presentationml/2006/main" xmlns:r="http://schemas.openxmlformats.org/officeDocument/2006/relationships">
+<p:sld xmlns:a="http://schemas.openxmlformats.org/drawingml/2006/main" xmlns:r="http://schemas.openxmlformats.org/officeDocument/2006/relationships" xmlns:p="http://schemas.openxmlformats.org/presentationml/2006/main">
   <p:cSld>
     <p:spTree>
       <p:nvGrpSpPr>
@@ -6544,7 +6719,14 @@
         <p:cNvGrpSpPr/>
         <p:nvPr/>
       </p:nvGrpSpPr>
-      <p:grpSpPr/>
+      <p:grpSpPr>
+        <a:xfrm>
+          <a:off x="0" y="0"/>
+          <a:ext cx="0" cy="0"/>
+          <a:chOff x="0" y="0"/>
+          <a:chExt cx="0" cy="0"/>
+        </a:xfrm>
+      </p:grpSpPr>
       <p:sp>
         <p:nvSpPr>
           <p:cNvPr id="2" name="Rectangle 1"/>
@@ -6585,6 +6767,7 @@
           <a:lstStyle/>
           <a:p>
             <a:pPr algn="ctr"/>
+            <a:endParaRPr/>
           </a:p>
         </p:txBody>
       </p:sp>
@@ -6694,7 +6877,7 @@
           </a:fontRef>
         </p:style>
         <p:txBody>
-          <a:bodyPr rtlCol="0" anchor="ctr" wrap="square"/>
+          <a:bodyPr wrap="square" rtlCol="0" anchor="ctr"/>
           <a:lstStyle/>
           <a:p>
             <a:pPr algn="ctr"/>
@@ -6783,7 +6966,7 @@
           </a:fontRef>
         </p:style>
         <p:txBody>
-          <a:bodyPr rtlCol="0" anchor="ctr" wrap="square"/>
+          <a:bodyPr wrap="square" rtlCol="0" anchor="ctr"/>
           <a:lstStyle/>
           <a:p>
             <a:pPr algn="ctr"/>
@@ -6872,7 +7055,7 @@
           </a:fontRef>
         </p:style>
         <p:txBody>
-          <a:bodyPr rtlCol="0" anchor="ctr" wrap="square"/>
+          <a:bodyPr wrap="square" rtlCol="0" anchor="ctr"/>
           <a:lstStyle/>
           <a:p>
             <a:pPr algn="ctr"/>
@@ -6960,7 +7143,7 @@
           </a:fontRef>
         </p:style>
         <p:txBody>
-          <a:bodyPr rtlCol="0" anchor="ctr" wrap="square"/>
+          <a:bodyPr wrap="square" rtlCol="0" anchor="ctr"/>
           <a:lstStyle/>
           <a:p>
             <a:pPr algn="ctr"/>
@@ -7048,7 +7231,7 @@
           </a:fontRef>
         </p:style>
         <p:txBody>
-          <a:bodyPr rtlCol="0" anchor="ctr" wrap="square"/>
+          <a:bodyPr wrap="square" rtlCol="0" anchor="ctr"/>
           <a:lstStyle/>
           <a:p>
             <a:pPr algn="ctr"/>
@@ -7137,7 +7320,7 @@
           </a:fontRef>
         </p:style>
         <p:txBody>
-          <a:bodyPr rtlCol="0" anchor="ctr" wrap="square"/>
+          <a:bodyPr wrap="square" rtlCol="0" anchor="ctr"/>
           <a:lstStyle/>
           <a:p>
             <a:pPr algn="ctr"/>
@@ -7367,7 +7550,7 @@
 </file>
 
 <file path=ppt/slides/slide6.xml><?xml version="1.0" encoding="utf-8"?>
-<p:sld xmlns:a="http://schemas.openxmlformats.org/drawingml/2006/main" xmlns:p="http://schemas.openxmlformats.org/presentationml/2006/main" xmlns:r="http://schemas.openxmlformats.org/officeDocument/2006/relationships">
+<p:sld xmlns:a="http://schemas.openxmlformats.org/drawingml/2006/main" xmlns:r="http://schemas.openxmlformats.org/officeDocument/2006/relationships" xmlns:p="http://schemas.openxmlformats.org/presentationml/2006/main">
   <p:cSld>
     <p:spTree>
       <p:nvGrpSpPr>
@@ -7375,7 +7558,14 @@
         <p:cNvGrpSpPr/>
         <p:nvPr/>
       </p:nvGrpSpPr>
-      <p:grpSpPr/>
+      <p:grpSpPr>
+        <a:xfrm>
+          <a:off x="0" y="0"/>
+          <a:ext cx="0" cy="0"/>
+          <a:chOff x="0" y="0"/>
+          <a:chExt cx="0" cy="0"/>
+        </a:xfrm>
+      </p:grpSpPr>
       <p:sp>
         <p:nvSpPr>
           <p:cNvPr id="2" name="Rectangle 1"/>
@@ -7416,6 +7606,7 @@
           <a:lstStyle/>
           <a:p>
             <a:pPr algn="ctr"/>
+            <a:endParaRPr/>
           </a:p>
         </p:txBody>
       </p:sp>
@@ -7525,7 +7716,7 @@
           </a:fontRef>
         </p:style>
         <p:txBody>
-          <a:bodyPr rtlCol="0" anchor="ctr" wrap="square"/>
+          <a:bodyPr wrap="square" rtlCol="0" anchor="ctr"/>
           <a:lstStyle/>
           <a:p>
             <a:pPr algn="ctr"/>
@@ -7613,7 +7804,7 @@
           </a:fontRef>
         </p:style>
         <p:txBody>
-          <a:bodyPr rtlCol="0" anchor="ctr" wrap="square"/>
+          <a:bodyPr wrap="square" rtlCol="0" anchor="ctr"/>
           <a:lstStyle/>
           <a:p>
             <a:pPr algn="ctr"/>
@@ -7702,7 +7893,7 @@
           </a:fontRef>
         </p:style>
         <p:txBody>
-          <a:bodyPr rtlCol="0" anchor="ctr" wrap="square"/>
+          <a:bodyPr wrap="square" rtlCol="0" anchor="ctr"/>
           <a:lstStyle/>
           <a:p>
             <a:pPr algn="ctr"/>
@@ -7791,7 +7982,7 @@
           </a:fontRef>
         </p:style>
         <p:txBody>
-          <a:bodyPr rtlCol="0" anchor="ctr" wrap="square"/>
+          <a:bodyPr wrap="square" rtlCol="0" anchor="ctr"/>
           <a:lstStyle/>
           <a:p>
             <a:pPr algn="ctr"/>
@@ -7879,7 +8070,7 @@
           </a:fontRef>
         </p:style>
         <p:txBody>
-          <a:bodyPr rtlCol="0" anchor="ctr" wrap="square"/>
+          <a:bodyPr wrap="square" rtlCol="0" anchor="ctr"/>
           <a:lstStyle/>
           <a:p>
             <a:pPr algn="ctr"/>
@@ -7968,7 +8159,7 @@
           </a:fontRef>
         </p:style>
         <p:txBody>
-          <a:bodyPr rtlCol="0" anchor="ctr" wrap="square"/>
+          <a:bodyPr wrap="square" rtlCol="0" anchor="ctr"/>
           <a:lstStyle/>
           <a:p>
             <a:pPr algn="ctr"/>
@@ -7991,7 +8182,13 @@
           <p:cNvGraphicFramePr>
             <a:graphicFrameLocks noGrp="1"/>
           </p:cNvGraphicFramePr>
-          <p:nvPr/>
+          <p:nvPr>
+            <p:extLst>
+              <p:ext uri="{D42A27DB-BD31-4B8C-83A1-F6EECF244321}">
+                <p14:modId xmlns:p14="http://schemas.microsoft.com/office/powerpoint/2010/main" val="3822020503"/>
+              </p:ext>
+            </p:extLst>
+          </p:nvPr>
         </p:nvGraphicFramePr>
         <p:xfrm>
           <a:off x="1371600" y="2606040"/>
@@ -8004,9 +8201,27 @@
                 <a:tableStyleId>{5C22544A-7EE6-4342-B048-85BDC9FD1C3A}</a:tableStyleId>
               </a:tblPr>
               <a:tblGrid>
-                <a:gridCol w="2743200"/>
-                <a:gridCol w="2743200"/>
-                <a:gridCol w="3657600"/>
+                <a:gridCol w="2743200">
+                  <a:extLst>
+                    <a:ext uri="{9D8B030D-6E8A-4147-A177-3AD203B41FA5}">
+                      <a16:colId xmlns:a16="http://schemas.microsoft.com/office/drawing/2014/main" val="20000"/>
+                    </a:ext>
+                  </a:extLst>
+                </a:gridCol>
+                <a:gridCol w="2743200">
+                  <a:extLst>
+                    <a:ext uri="{9D8B030D-6E8A-4147-A177-3AD203B41FA5}">
+                      <a16:colId xmlns:a16="http://schemas.microsoft.com/office/drawing/2014/main" val="20001"/>
+                    </a:ext>
+                  </a:extLst>
+                </a:gridCol>
+                <a:gridCol w="3657600">
+                  <a:extLst>
+                    <a:ext uri="{9D8B030D-6E8A-4147-A177-3AD203B41FA5}">
+                      <a16:colId xmlns:a16="http://schemas.microsoft.com/office/drawing/2014/main" val="20002"/>
+                    </a:ext>
+                  </a:extLst>
+                </a:gridCol>
               </a:tblGrid>
               <a:tr h="405384">
                 <a:tc>
@@ -8025,7 +8240,7 @@
                       </a:r>
                     </a:p>
                   </a:txBody>
-                  <a:tcPr>
+                  <a:tcPr anchor="ctr">
                     <a:solidFill>
                       <a:srgbClr val="0F172A"/>
                     </a:solidFill>
@@ -8047,7 +8262,7 @@
                       </a:r>
                     </a:p>
                   </a:txBody>
-                  <a:tcPr>
+                  <a:tcPr anchor="ctr">
                     <a:solidFill>
                       <a:srgbClr val="0F172A"/>
                     </a:solidFill>
@@ -8069,12 +8284,17 @@
                       </a:r>
                     </a:p>
                   </a:txBody>
-                  <a:tcPr>
+                  <a:tcPr anchor="ctr">
                     <a:solidFill>
                       <a:srgbClr val="0F172A"/>
                     </a:solidFill>
                   </a:tcPr>
                 </a:tc>
+                <a:extLst>
+                  <a:ext uri="{0D108BD9-81ED-4DB2-BD59-A6C34878D82A}">
+                    <a16:rowId xmlns:a16="http://schemas.microsoft.com/office/drawing/2014/main" val="10000"/>
+                  </a:ext>
+                </a:extLst>
               </a:tr>
               <a:tr h="405384">
                 <a:tc>
@@ -8093,7 +8313,7 @@
                       </a:r>
                     </a:p>
                   </a:txBody>
-                  <a:tcPr/>
+                  <a:tcPr anchor="ctr"/>
                 </a:tc>
                 <a:tc>
                   <a:txBody>
@@ -8111,7 +8331,7 @@
                       </a:r>
                     </a:p>
                   </a:txBody>
-                  <a:tcPr/>
+                  <a:tcPr anchor="ctr"/>
                 </a:tc>
                 <a:tc>
                   <a:txBody>
@@ -8129,8 +8349,13 @@
                       </a:r>
                     </a:p>
                   </a:txBody>
-                  <a:tcPr/>
+                  <a:tcPr anchor="ctr"/>
                 </a:tc>
+                <a:extLst>
+                  <a:ext uri="{0D108BD9-81ED-4DB2-BD59-A6C34878D82A}">
+                    <a16:rowId xmlns:a16="http://schemas.microsoft.com/office/drawing/2014/main" val="10001"/>
+                  </a:ext>
+                </a:extLst>
               </a:tr>
               <a:tr h="405384">
                 <a:tc>
@@ -8149,7 +8374,7 @@
                       </a:r>
                     </a:p>
                   </a:txBody>
-                  <a:tcPr>
+                  <a:tcPr anchor="ctr">
                     <a:solidFill>
                       <a:srgbClr val="F8FAFC"/>
                     </a:solidFill>
@@ -8171,7 +8396,7 @@
                       </a:r>
                     </a:p>
                   </a:txBody>
-                  <a:tcPr>
+                  <a:tcPr anchor="ctr">
                     <a:solidFill>
                       <a:srgbClr val="F8FAFC"/>
                     </a:solidFill>
@@ -8193,12 +8418,17 @@
                       </a:r>
                     </a:p>
                   </a:txBody>
-                  <a:tcPr>
+                  <a:tcPr anchor="ctr">
                     <a:solidFill>
                       <a:srgbClr val="F8FAFC"/>
                     </a:solidFill>
                   </a:tcPr>
                 </a:tc>
+                <a:extLst>
+                  <a:ext uri="{0D108BD9-81ED-4DB2-BD59-A6C34878D82A}">
+                    <a16:rowId xmlns:a16="http://schemas.microsoft.com/office/drawing/2014/main" val="10002"/>
+                  </a:ext>
+                </a:extLst>
               </a:tr>
               <a:tr h="405384">
                 <a:tc>
@@ -8217,7 +8447,7 @@
                       </a:r>
                     </a:p>
                   </a:txBody>
-                  <a:tcPr/>
+                  <a:tcPr anchor="ctr"/>
                 </a:tc>
                 <a:tc>
                   <a:txBody>
@@ -8235,7 +8465,7 @@
                       </a:r>
                     </a:p>
                   </a:txBody>
-                  <a:tcPr/>
+                  <a:tcPr anchor="ctr"/>
                 </a:tc>
                 <a:tc>
                   <a:txBody>
@@ -8253,8 +8483,13 @@
                       </a:r>
                     </a:p>
                   </a:txBody>
-                  <a:tcPr/>
+                  <a:tcPr anchor="ctr"/>
                 </a:tc>
+                <a:extLst>
+                  <a:ext uri="{0D108BD9-81ED-4DB2-BD59-A6C34878D82A}">
+                    <a16:rowId xmlns:a16="http://schemas.microsoft.com/office/drawing/2014/main" val="10003"/>
+                  </a:ext>
+                </a:extLst>
               </a:tr>
               <a:tr h="405384">
                 <a:tc>
@@ -8273,7 +8508,7 @@
                       </a:r>
                     </a:p>
                   </a:txBody>
-                  <a:tcPr>
+                  <a:tcPr anchor="ctr">
                     <a:solidFill>
                       <a:srgbClr val="F8FAFC"/>
                     </a:solidFill>
@@ -8295,7 +8530,7 @@
                       </a:r>
                     </a:p>
                   </a:txBody>
-                  <a:tcPr>
+                  <a:tcPr anchor="ctr">
                     <a:solidFill>
                       <a:srgbClr val="F8FAFC"/>
                     </a:solidFill>
@@ -8317,12 +8552,17 @@
                       </a:r>
                     </a:p>
                   </a:txBody>
-                  <a:tcPr>
+                  <a:tcPr anchor="ctr">
                     <a:solidFill>
                       <a:srgbClr val="F8FAFC"/>
                     </a:solidFill>
                   </a:tcPr>
                 </a:tc>
+                <a:extLst>
+                  <a:ext uri="{0D108BD9-81ED-4DB2-BD59-A6C34878D82A}">
+                    <a16:rowId xmlns:a16="http://schemas.microsoft.com/office/drawing/2014/main" val="10004"/>
+                  </a:ext>
+                </a:extLst>
               </a:tr>
               <a:tr h="405384">
                 <a:tc>
@@ -8341,7 +8581,7 @@
                       </a:r>
                     </a:p>
                   </a:txBody>
-                  <a:tcPr/>
+                  <a:tcPr anchor="ctr"/>
                 </a:tc>
                 <a:tc>
                   <a:txBody>
@@ -8359,7 +8599,7 @@
                       </a:r>
                     </a:p>
                   </a:txBody>
-                  <a:tcPr/>
+                  <a:tcPr anchor="ctr"/>
                 </a:tc>
                 <a:tc>
                   <a:txBody>
@@ -8367,7 +8607,7 @@
                     <a:lstStyle/>
                     <a:p>
                       <a:r>
-                        <a:rPr sz="1000">
+                        <a:rPr sz="1000" dirty="0">
                           <a:solidFill>
                             <a:srgbClr val="0F172A"/>
                           </a:solidFill>
@@ -8377,8 +8617,13 @@
                       </a:r>
                     </a:p>
                   </a:txBody>
-                  <a:tcPr/>
+                  <a:tcPr anchor="ctr"/>
                 </a:tc>
+                <a:extLst>
+                  <a:ext uri="{0D108BD9-81ED-4DB2-BD59-A6C34878D82A}">
+                    <a16:rowId xmlns:a16="http://schemas.microsoft.com/office/drawing/2014/main" val="10005"/>
+                  </a:ext>
+                </a:extLst>
               </a:tr>
             </a:tbl>
           </a:graphicData>
@@ -8427,7 +8672,7 @@
 </file>
 
 <file path=ppt/slides/slide7.xml><?xml version="1.0" encoding="utf-8"?>
-<p:sld xmlns:a="http://schemas.openxmlformats.org/drawingml/2006/main" xmlns:p="http://schemas.openxmlformats.org/presentationml/2006/main" xmlns:r="http://schemas.openxmlformats.org/officeDocument/2006/relationships">
+<p:sld xmlns:a="http://schemas.openxmlformats.org/drawingml/2006/main" xmlns:r="http://schemas.openxmlformats.org/officeDocument/2006/relationships" xmlns:p="http://schemas.openxmlformats.org/presentationml/2006/main">
   <p:cSld>
     <p:spTree>
       <p:nvGrpSpPr>
@@ -8435,7 +8680,14 @@
         <p:cNvGrpSpPr/>
         <p:nvPr/>
       </p:nvGrpSpPr>
-      <p:grpSpPr/>
+      <p:grpSpPr>
+        <a:xfrm>
+          <a:off x="0" y="0"/>
+          <a:ext cx="0" cy="0"/>
+          <a:chOff x="0" y="0"/>
+          <a:chExt cx="0" cy="0"/>
+        </a:xfrm>
+      </p:grpSpPr>
       <p:sp>
         <p:nvSpPr>
           <p:cNvPr id="2" name="Rectangle 1"/>
@@ -8476,6 +8728,7 @@
           <a:lstStyle/>
           <a:p>
             <a:pPr algn="ctr"/>
+            <a:endParaRPr/>
           </a:p>
         </p:txBody>
       </p:sp>
@@ -8862,7 +9115,7 @@
 </file>
 
 <file path=ppt/slides/slide8.xml><?xml version="1.0" encoding="utf-8"?>
-<p:sld xmlns:a="http://schemas.openxmlformats.org/drawingml/2006/main" xmlns:p="http://schemas.openxmlformats.org/presentationml/2006/main" xmlns:r="http://schemas.openxmlformats.org/officeDocument/2006/relationships">
+<p:sld xmlns:a="http://schemas.openxmlformats.org/drawingml/2006/main" xmlns:r="http://schemas.openxmlformats.org/officeDocument/2006/relationships" xmlns:p="http://schemas.openxmlformats.org/presentationml/2006/main">
   <p:cSld>
     <p:spTree>
       <p:nvGrpSpPr>
@@ -8870,7 +9123,14 @@
         <p:cNvGrpSpPr/>
         <p:nvPr/>
       </p:nvGrpSpPr>
-      <p:grpSpPr/>
+      <p:grpSpPr>
+        <a:xfrm>
+          <a:off x="0" y="0"/>
+          <a:ext cx="0" cy="0"/>
+          <a:chOff x="0" y="0"/>
+          <a:chExt cx="0" cy="0"/>
+        </a:xfrm>
+      </p:grpSpPr>
       <p:sp>
         <p:nvSpPr>
           <p:cNvPr id="2" name="Rectangle 1"/>
@@ -8911,6 +9171,7 @@
           <a:lstStyle/>
           <a:p>
             <a:pPr algn="ctr"/>
+            <a:endParaRPr/>
           </a:p>
         </p:txBody>
       </p:sp>
@@ -8988,7 +9249,13 @@
           <p:cNvGraphicFramePr>
             <a:graphicFrameLocks noGrp="1"/>
           </p:cNvGraphicFramePr>
-          <p:nvPr/>
+          <p:nvPr>
+            <p:extLst>
+              <p:ext uri="{D42A27DB-BD31-4B8C-83A1-F6EECF244321}">
+                <p14:modId xmlns:p14="http://schemas.microsoft.com/office/powerpoint/2010/main" val="2373277411"/>
+              </p:ext>
+            </p:extLst>
+          </p:nvPr>
         </p:nvGraphicFramePr>
         <p:xfrm>
           <a:off x="411480" y="1325880"/>
@@ -9001,10 +9268,34 @@
                 <a:tableStyleId>{5C22544A-7EE6-4342-B048-85BDC9FD1C3A}</a:tableStyleId>
               </a:tblPr>
               <a:tblGrid>
-                <a:gridCol w="1097280"/>
-                <a:gridCol w="2926080"/>
-                <a:gridCol w="3108960"/>
-                <a:gridCol w="4023360"/>
+                <a:gridCol w="1097280">
+                  <a:extLst>
+                    <a:ext uri="{9D8B030D-6E8A-4147-A177-3AD203B41FA5}">
+                      <a16:colId xmlns:a16="http://schemas.microsoft.com/office/drawing/2014/main" val="20000"/>
+                    </a:ext>
+                  </a:extLst>
+                </a:gridCol>
+                <a:gridCol w="2926080">
+                  <a:extLst>
+                    <a:ext uri="{9D8B030D-6E8A-4147-A177-3AD203B41FA5}">
+                      <a16:colId xmlns:a16="http://schemas.microsoft.com/office/drawing/2014/main" val="20001"/>
+                    </a:ext>
+                  </a:extLst>
+                </a:gridCol>
+                <a:gridCol w="3108960">
+                  <a:extLst>
+                    <a:ext uri="{9D8B030D-6E8A-4147-A177-3AD203B41FA5}">
+                      <a16:colId xmlns:a16="http://schemas.microsoft.com/office/drawing/2014/main" val="20002"/>
+                    </a:ext>
+                  </a:extLst>
+                </a:gridCol>
+                <a:gridCol w="4023360">
+                  <a:extLst>
+                    <a:ext uri="{9D8B030D-6E8A-4147-A177-3AD203B41FA5}">
+                      <a16:colId xmlns:a16="http://schemas.microsoft.com/office/drawing/2014/main" val="20003"/>
+                    </a:ext>
+                  </a:extLst>
+                </a:gridCol>
               </a:tblGrid>
               <a:tr h="390906">
                 <a:tc>
@@ -9023,7 +9314,7 @@
                       </a:r>
                     </a:p>
                   </a:txBody>
-                  <a:tcPr>
+                  <a:tcPr anchor="ctr">
                     <a:solidFill>
                       <a:srgbClr val="0F172A"/>
                     </a:solidFill>
@@ -9045,7 +9336,7 @@
                       </a:r>
                     </a:p>
                   </a:txBody>
-                  <a:tcPr>
+                  <a:tcPr anchor="ctr">
                     <a:solidFill>
                       <a:srgbClr val="0F172A"/>
                     </a:solidFill>
@@ -9067,7 +9358,7 @@
                       </a:r>
                     </a:p>
                   </a:txBody>
-                  <a:tcPr>
+                  <a:tcPr anchor="ctr">
                     <a:solidFill>
                       <a:srgbClr val="0F172A"/>
                     </a:solidFill>
@@ -9089,12 +9380,17 @@
                       </a:r>
                     </a:p>
                   </a:txBody>
-                  <a:tcPr>
+                  <a:tcPr anchor="ctr">
                     <a:solidFill>
                       <a:srgbClr val="0F172A"/>
                     </a:solidFill>
                   </a:tcPr>
                 </a:tc>
+                <a:extLst>
+                  <a:ext uri="{0D108BD9-81ED-4DB2-BD59-A6C34878D82A}">
+                    <a16:rowId xmlns:a16="http://schemas.microsoft.com/office/drawing/2014/main" val="10000"/>
+                  </a:ext>
+                </a:extLst>
               </a:tr>
               <a:tr h="390906">
                 <a:tc>
@@ -9113,7 +9409,7 @@
                       </a:r>
                     </a:p>
                   </a:txBody>
-                  <a:tcPr/>
+                  <a:tcPr anchor="ctr"/>
                 </a:tc>
                 <a:tc>
                   <a:txBody>
@@ -9131,7 +9427,7 @@
                       </a:r>
                     </a:p>
                   </a:txBody>
-                  <a:tcPr/>
+                  <a:tcPr anchor="ctr"/>
                 </a:tc>
                 <a:tc>
                   <a:txBody>
@@ -9149,7 +9445,7 @@
                       </a:r>
                     </a:p>
                   </a:txBody>
-                  <a:tcPr/>
+                  <a:tcPr anchor="ctr"/>
                 </a:tc>
                 <a:tc>
                   <a:txBody>
@@ -9167,8 +9463,13 @@
                       </a:r>
                     </a:p>
                   </a:txBody>
-                  <a:tcPr/>
+                  <a:tcPr anchor="ctr"/>
                 </a:tc>
+                <a:extLst>
+                  <a:ext uri="{0D108BD9-81ED-4DB2-BD59-A6C34878D82A}">
+                    <a16:rowId xmlns:a16="http://schemas.microsoft.com/office/drawing/2014/main" val="10001"/>
+                  </a:ext>
+                </a:extLst>
               </a:tr>
               <a:tr h="390906">
                 <a:tc>
@@ -9187,7 +9488,7 @@
                       </a:r>
                     </a:p>
                   </a:txBody>
-                  <a:tcPr>
+                  <a:tcPr anchor="ctr">
                     <a:solidFill>
                       <a:srgbClr val="F8FAFC"/>
                     </a:solidFill>
@@ -9209,7 +9510,7 @@
                       </a:r>
                     </a:p>
                   </a:txBody>
-                  <a:tcPr>
+                  <a:tcPr anchor="ctr">
                     <a:solidFill>
                       <a:srgbClr val="F8FAFC"/>
                     </a:solidFill>
@@ -9231,7 +9532,7 @@
                       </a:r>
                     </a:p>
                   </a:txBody>
-                  <a:tcPr>
+                  <a:tcPr anchor="ctr">
                     <a:solidFill>
                       <a:srgbClr val="F8FAFC"/>
                     </a:solidFill>
@@ -9253,12 +9554,17 @@
                       </a:r>
                     </a:p>
                   </a:txBody>
-                  <a:tcPr>
+                  <a:tcPr anchor="ctr">
                     <a:solidFill>
                       <a:srgbClr val="F8FAFC"/>
                     </a:solidFill>
                   </a:tcPr>
                 </a:tc>
+                <a:extLst>
+                  <a:ext uri="{0D108BD9-81ED-4DB2-BD59-A6C34878D82A}">
+                    <a16:rowId xmlns:a16="http://schemas.microsoft.com/office/drawing/2014/main" val="10002"/>
+                  </a:ext>
+                </a:extLst>
               </a:tr>
               <a:tr h="390906">
                 <a:tc>
@@ -9277,7 +9583,7 @@
                       </a:r>
                     </a:p>
                   </a:txBody>
-                  <a:tcPr/>
+                  <a:tcPr anchor="ctr"/>
                 </a:tc>
                 <a:tc>
                   <a:txBody>
@@ -9295,7 +9601,7 @@
                       </a:r>
                     </a:p>
                   </a:txBody>
-                  <a:tcPr/>
+                  <a:tcPr anchor="ctr"/>
                 </a:tc>
                 <a:tc>
                   <a:txBody>
@@ -9313,7 +9619,7 @@
                       </a:r>
                     </a:p>
                   </a:txBody>
-                  <a:tcPr/>
+                  <a:tcPr anchor="ctr"/>
                 </a:tc>
                 <a:tc>
                   <a:txBody>
@@ -9331,8 +9637,13 @@
                       </a:r>
                     </a:p>
                   </a:txBody>
-                  <a:tcPr/>
+                  <a:tcPr anchor="ctr"/>
                 </a:tc>
+                <a:extLst>
+                  <a:ext uri="{0D108BD9-81ED-4DB2-BD59-A6C34878D82A}">
+                    <a16:rowId xmlns:a16="http://schemas.microsoft.com/office/drawing/2014/main" val="10003"/>
+                  </a:ext>
+                </a:extLst>
               </a:tr>
               <a:tr h="390906">
                 <a:tc>
@@ -9351,7 +9662,7 @@
                       </a:r>
                     </a:p>
                   </a:txBody>
-                  <a:tcPr>
+                  <a:tcPr anchor="ctr">
                     <a:solidFill>
                       <a:srgbClr val="F8FAFC"/>
                     </a:solidFill>
@@ -9373,7 +9684,7 @@
                       </a:r>
                     </a:p>
                   </a:txBody>
-                  <a:tcPr>
+                  <a:tcPr anchor="ctr">
                     <a:solidFill>
                       <a:srgbClr val="F8FAFC"/>
                     </a:solidFill>
@@ -9395,7 +9706,7 @@
                       </a:r>
                     </a:p>
                   </a:txBody>
-                  <a:tcPr>
+                  <a:tcPr anchor="ctr">
                     <a:solidFill>
                       <a:srgbClr val="F8FAFC"/>
                     </a:solidFill>
@@ -9417,12 +9728,17 @@
                       </a:r>
                     </a:p>
                   </a:txBody>
-                  <a:tcPr>
+                  <a:tcPr anchor="ctr">
                     <a:solidFill>
                       <a:srgbClr val="F8FAFC"/>
                     </a:solidFill>
                   </a:tcPr>
                 </a:tc>
+                <a:extLst>
+                  <a:ext uri="{0D108BD9-81ED-4DB2-BD59-A6C34878D82A}">
+                    <a16:rowId xmlns:a16="http://schemas.microsoft.com/office/drawing/2014/main" val="10004"/>
+                  </a:ext>
+                </a:extLst>
               </a:tr>
               <a:tr h="390906">
                 <a:tc>
@@ -9441,7 +9757,7 @@
                       </a:r>
                     </a:p>
                   </a:txBody>
-                  <a:tcPr/>
+                  <a:tcPr anchor="ctr"/>
                 </a:tc>
                 <a:tc>
                   <a:txBody>
@@ -9459,7 +9775,7 @@
                       </a:r>
                     </a:p>
                   </a:txBody>
-                  <a:tcPr/>
+                  <a:tcPr anchor="ctr"/>
                 </a:tc>
                 <a:tc>
                   <a:txBody>
@@ -9477,7 +9793,7 @@
                       </a:r>
                     </a:p>
                   </a:txBody>
-                  <a:tcPr/>
+                  <a:tcPr anchor="ctr"/>
                 </a:tc>
                 <a:tc>
                   <a:txBody>
@@ -9495,8 +9811,13 @@
                       </a:r>
                     </a:p>
                   </a:txBody>
-                  <a:tcPr/>
+                  <a:tcPr anchor="ctr"/>
                 </a:tc>
+                <a:extLst>
+                  <a:ext uri="{0D108BD9-81ED-4DB2-BD59-A6C34878D82A}">
+                    <a16:rowId xmlns:a16="http://schemas.microsoft.com/office/drawing/2014/main" val="10005"/>
+                  </a:ext>
+                </a:extLst>
               </a:tr>
               <a:tr h="390906">
                 <a:tc>
@@ -9515,7 +9836,7 @@
                       </a:r>
                     </a:p>
                   </a:txBody>
-                  <a:tcPr>
+                  <a:tcPr anchor="ctr">
                     <a:solidFill>
                       <a:srgbClr val="F8FAFC"/>
                     </a:solidFill>
@@ -9537,7 +9858,7 @@
                       </a:r>
                     </a:p>
                   </a:txBody>
-                  <a:tcPr>
+                  <a:tcPr anchor="ctr">
                     <a:solidFill>
                       <a:srgbClr val="F8FAFC"/>
                     </a:solidFill>
@@ -9559,7 +9880,7 @@
                       </a:r>
                     </a:p>
                   </a:txBody>
-                  <a:tcPr>
+                  <a:tcPr anchor="ctr">
                     <a:solidFill>
                       <a:srgbClr val="F8FAFC"/>
                     </a:solidFill>
@@ -9581,12 +9902,17 @@
                       </a:r>
                     </a:p>
                   </a:txBody>
-                  <a:tcPr>
+                  <a:tcPr anchor="ctr">
                     <a:solidFill>
                       <a:srgbClr val="F8FAFC"/>
                     </a:solidFill>
                   </a:tcPr>
                 </a:tc>
+                <a:extLst>
+                  <a:ext uri="{0D108BD9-81ED-4DB2-BD59-A6C34878D82A}">
+                    <a16:rowId xmlns:a16="http://schemas.microsoft.com/office/drawing/2014/main" val="10006"/>
+                  </a:ext>
+                </a:extLst>
               </a:tr>
               <a:tr h="390906">
                 <a:tc>
@@ -9605,7 +9931,7 @@
                       </a:r>
                     </a:p>
                   </a:txBody>
-                  <a:tcPr/>
+                  <a:tcPr anchor="ctr"/>
                 </a:tc>
                 <a:tc>
                   <a:txBody>
@@ -9623,7 +9949,7 @@
                       </a:r>
                     </a:p>
                   </a:txBody>
-                  <a:tcPr/>
+                  <a:tcPr anchor="ctr"/>
                 </a:tc>
                 <a:tc>
                   <a:txBody>
@@ -9641,7 +9967,7 @@
                       </a:r>
                     </a:p>
                   </a:txBody>
-                  <a:tcPr/>
+                  <a:tcPr anchor="ctr"/>
                 </a:tc>
                 <a:tc>
                   <a:txBody>
@@ -9649,18 +9975,47 @@
                     <a:lstStyle/>
                     <a:p>
                       <a:r>
-                        <a:rPr sz="1000">
+                        <a:rPr sz="1000" dirty="0" err="1">
                           <a:solidFill>
                             <a:srgbClr val="0F172A"/>
                           </a:solidFill>
                           <a:latin typeface="Malgun Gothic"/>
                         </a:rPr>
-                        <a:t>Secrets·KBO league id 점검</a:t>
-                      </a:r>
+                        <a:t>Secrets·KBO</a:t>
+                      </a:r>
+                      <a:r>
+                        <a:rPr sz="1000" dirty="0">
+                          <a:solidFill>
+                            <a:srgbClr val="0F172A"/>
+                          </a:solidFill>
+                          <a:latin typeface="Malgun Gothic"/>
+                        </a:rPr>
+                        <a:t> league id </a:t>
+                      </a:r>
+                      <a:r>
+                        <a:rPr sz="1000" dirty="0" err="1">
+                          <a:solidFill>
+                            <a:srgbClr val="0F172A"/>
+                          </a:solidFill>
+                          <a:latin typeface="Malgun Gothic"/>
+                        </a:rPr>
+                        <a:t>점검</a:t>
+                      </a:r>
+                      <a:endParaRPr sz="1000" dirty="0">
+                        <a:solidFill>
+                          <a:srgbClr val="0F172A"/>
+                        </a:solidFill>
+                        <a:latin typeface="Malgun Gothic"/>
+                      </a:endParaRPr>
                     </a:p>
                   </a:txBody>
-                  <a:tcPr/>
+                  <a:tcPr anchor="ctr"/>
                 </a:tc>
+                <a:extLst>
+                  <a:ext uri="{0D108BD9-81ED-4DB2-BD59-A6C34878D82A}">
+                    <a16:rowId xmlns:a16="http://schemas.microsoft.com/office/drawing/2014/main" val="10007"/>
+                  </a:ext>
+                </a:extLst>
               </a:tr>
             </a:tbl>
           </a:graphicData>
@@ -9709,7 +10064,7 @@
 </file>
 
 <file path=ppt/slides/slide9.xml><?xml version="1.0" encoding="utf-8"?>
-<p:sld xmlns:a="http://schemas.openxmlformats.org/drawingml/2006/main" xmlns:p="http://schemas.openxmlformats.org/presentationml/2006/main" xmlns:r="http://schemas.openxmlformats.org/officeDocument/2006/relationships">
+<p:sld xmlns:a="http://schemas.openxmlformats.org/drawingml/2006/main" xmlns:r="http://schemas.openxmlformats.org/officeDocument/2006/relationships" xmlns:p="http://schemas.openxmlformats.org/presentationml/2006/main">
   <p:cSld>
     <p:spTree>
       <p:nvGrpSpPr>
@@ -9717,7 +10072,14 @@
         <p:cNvGrpSpPr/>
         <p:nvPr/>
       </p:nvGrpSpPr>
-      <p:grpSpPr/>
+      <p:grpSpPr>
+        <a:xfrm>
+          <a:off x="0" y="0"/>
+          <a:ext cx="0" cy="0"/>
+          <a:chOff x="0" y="0"/>
+          <a:chExt cx="0" cy="0"/>
+        </a:xfrm>
+      </p:grpSpPr>
       <p:sp>
         <p:nvSpPr>
           <p:cNvPr id="2" name="Rectangle 1"/>
@@ -9758,6 +10120,7 @@
           <a:lstStyle/>
           <a:p>
             <a:pPr algn="ctr"/>
+            <a:endParaRPr/>
           </a:p>
         </p:txBody>
       </p:sp>
